--- a/it/slides/12-Architettura_dei_Calcolatori-Verm1_Parte_2.pptx
+++ b/it/slides/12-Architettura_dei_Calcolatori-Verm1_Parte_2.pptx
@@ -119,7 +119,7 @@
   <p:extLst>
     <p:ext uri="{521415D9-36F7-43E2-AB2F-B90AF26B5E84}">
       <p14:sectionLst xmlns:p14="http://schemas.microsoft.com/office/powerpoint/2010/main">
-        <p14:section name="Apertura" id="{9f680fa5-bee8-034d-316d-df8d20eaa4c7}">
+        <p14:section name="Apertura" id="{091b71f1-2988-69a5-2706-2babc89c2f7b}">
           <p14:sldIdLst>
             <p14:sldId id="256"/>
             <p14:sldId id="257"/>
@@ -127,18 +127,18 @@
             <p14:sldId id="259"/>
           </p14:sldIdLst>
         </p14:section>
-        <p14:section name="Passo 1: nomi per i bit" id="{635b0198-19d3-12fc-c015-f042790e1890}">
+        <p14:section name="Passo 1: nomi per i bit" id="{cc145500-f9b0-ffba-3924-a8de41179881}">
           <p14:sldIdLst>
             <p14:sldId id="260"/>
           </p14:sldIdLst>
         </p14:section>
-        <p14:section name="Passo 2: la guida" id="{dddeea7b-5f77-dd07-3962-d55e150d9530}">
+        <p14:section name="Passo 2: la guida" id="{75f918da-1156-21a8-06a3-d059380e527c}">
           <p14:sldIdLst>
             <p14:sldId id="261"/>
             <p14:sldId id="262"/>
           </p14:sldIdLst>
         </p14:section>
-        <p14:section name="Passo 4: osservare una decisione" id="{37177627-3059-e085-3642-97fdfa9a16b2}">
+        <p14:section name="Passo 4: osservare una decisione" id="{1c733c7c-36c2-ab2e-efc0-e5014e23c763}">
           <p14:sldIdLst>
             <p14:sldId id="263"/>
             <p14:sldId id="264"/>
@@ -2693,7 +2693,63 @@
       </p:sp>
       <p:sp>
         <p:nvSpPr>
-          <p:cNvPr id="13" name="Shape 11"/>
+          <p:cNvPr id="13" name="Text 11"/>
+          <p:cNvSpPr txBox="1"/>
+          <p:nvPr/>
+        </p:nvSpPr>
+        <p:spPr>
+          <a:xfrm>
+            <a:off x="4693615" y="566928"/>
+            <a:ext cx="6949440" cy="640080"/>
+          </a:xfrm>
+          <a:prstGeom prst="rect">
+            <a:avLst/>
+          </a:prstGeom>
+          <a:noFill/>
+          <a:ln/>
+        </p:spPr>
+        <p:txBody>
+          <a:bodyPr wrap="square" lIns="0" tIns="0" rIns="0" bIns="0" rtlCol="0" anchor="t"/>
+          <a:lstStyle/>
+          <a:p>
+            <a:pPr algn="r" indent="0" marL="0">
+              <a:buNone/>
+            </a:pPr>
+            <a:r>
+              <a:rPr lang="en-US" sz="1300" dirty="0">
+                <a:solidFill>
+                  <a:srgbClr val="CFE3EA"/>
+                </a:solidFill>
+                <a:latin typeface="Calibri" pitchFamily="34" charset="0"/>
+                <a:ea typeface="Calibri" pitchFamily="34" charset="-122"/>
+                <a:cs typeface="Calibri" pitchFamily="34" charset="-120"/>
+              </a:rPr>
+              <a:t>Presentazione della lezione. I listati, il programma completo e come provarlo sono nella presentazione del codice:</a:t>
+            </a:r>
+            <a:endParaRPr lang="en-US" sz="1300" dirty="0"/>
+          </a:p>
+          <a:p>
+            <a:pPr algn="r" indent="0" marL="0">
+              <a:buNone/>
+            </a:pPr>
+            <a:r>
+              <a:rPr lang="en-US" sz="1300" dirty="0">
+                <a:solidFill>
+                  <a:srgbClr val="CFE3EA"/>
+                </a:solidFill>
+                <a:latin typeface="Calibri" pitchFamily="34" charset="0"/>
+                <a:ea typeface="Calibri" pitchFamily="34" charset="-122"/>
+                <a:cs typeface="Calibri" pitchFamily="34" charset="-120"/>
+              </a:rPr>
+              <a:t>12-Architettura_dei_Calcolatori-Verm1_Parte_2-Codice.pptx</a:t>
+            </a:r>
+            <a:endParaRPr lang="en-US" sz="1300" dirty="0"/>
+          </a:p>
+        </p:txBody>
+      </p:sp>
+      <p:sp>
+        <p:nvSpPr>
+          <p:cNvPr id="14" name="Shape 12"/>
           <p:cNvSpPr/>
           <p:nvPr/>
         </p:nvSpPr>
@@ -2720,7 +2776,7 @@
       </p:sp>
       <p:pic>
         <p:nvPicPr>
-          <p:cNvPr id="14" name="Image 0" descr="/Users/raffaelemontella/devel/riscv-prg32/computer-architecture-with-prg32/tools/assets/verm1_p2.png">    </p:cNvPr>
+          <p:cNvPr id="15" name="Image 0" descr="/Users/raffaelemontella/devel/riscv-prg32/computer-architecture-with-prg32/tools/assets/verm1_p2.png">    </p:cNvPr>
           <p:cNvPicPr>
             <a:picLocks noChangeAspect="1"/>
           </p:cNvPicPr>

--- a/it/slides/12-Architettura_dei_Calcolatori-Verm1_Parte_2.pptx
+++ b/it/slides/12-Architettura_dei_Calcolatori-Verm1_Parte_2.pptx
@@ -119,7 +119,7 @@
   <p:extLst>
     <p:ext uri="{521415D9-36F7-43E2-AB2F-B90AF26B5E84}">
       <p14:sectionLst xmlns:p14="http://schemas.microsoft.com/office/powerpoint/2010/main">
-        <p14:section name="Apertura" id="{091b71f1-2988-69a5-2706-2babc89c2f7b}">
+        <p14:section name="Apertura" id="{a0407c6a-96ba-b436-6cdd-c1c9c28ae43c}">
           <p14:sldIdLst>
             <p14:sldId id="256"/>
             <p14:sldId id="257"/>
@@ -127,18 +127,18 @@
             <p14:sldId id="259"/>
           </p14:sldIdLst>
         </p14:section>
-        <p14:section name="Passo 1: nomi per i bit" id="{cc145500-f9b0-ffba-3924-a8de41179881}">
+        <p14:section name="Passo 1: nomi per i bit" id="{3fb426f7-3cd5-ece7-719d-7dab24e90bcd}">
           <p14:sldIdLst>
             <p14:sldId id="260"/>
           </p14:sldIdLst>
         </p14:section>
-        <p14:section name="Passo 2: la guida" id="{75f918da-1156-21a8-06a3-d059380e527c}">
+        <p14:section name="Passo 2: la guida" id="{4f0b1e4f-bfb5-dcda-7b35-f4a313d3e702}">
           <p14:sldIdLst>
             <p14:sldId id="261"/>
             <p14:sldId id="262"/>
           </p14:sldIdLst>
         </p14:section>
-        <p14:section name="Passo 4: osservare una decisione" id="{1c733c7c-36c2-ab2e-efc0-e5014e23c763}">
+        <p14:section name="Passo 4: osservare una decisione" id="{c76ec92f-1f7c-be92-2a6f-7a4a21cb9544}">
           <p14:sldIdLst>
             <p14:sldId id="263"/>
             <p14:sldId id="264"/>
@@ -553,6 +553,8 @@
             <a:r>
               <a:rPr lang="en-US" dirty="0"/>
               <a:t>Il secondo tutorial del progetto. Alla fine della Parte 1 la testa attraversava lo schermo da sola; oggi nel gioco entra il giocatore. Aggiungete la guida con il joystick, il cibo che compare a caso, un punteggio e un suono. Tutto poggia sulle quattro lezioni del blocco di logica: un pulsante è un bit selezionato da una maschera, la regola contro l'inversione a U è un solo XOR, il movimento si legge da una tabella come lo selezionerebbe un multiplexer. La frase di Sid Meier in copertina dice che cosa state aggiungendo: scelte.
+Stato di apprendimento: DA COMPRENDERE OGGI, alla fine di questa lezione lo spiegate, lo seguite passo passo e lo applicate da soli; DA UTILIZZARE OGGI, oggi seguite e usate la ricetta; come funziona dentro si spiega più avanti, o non fa parte del corso; DA COMPRENDERE PIÙ AVANTI, riconoscete il nome e lo scopo; lo spiega una lezione successiva. Una slide senza etichetta è contesto: una storia, un esempio, una domanda, un esercizio.
+Stato di apprendimento di questa lezione. DA COMPRENDERE OGGI: le maschere di bit; i codici; gli array in memoria; gli ingressi con pull-up; l'algebra di Boole; la virgola fissa; i multiplexer; istruzioni con o senza segno; comparatori e parità; gli argomenti in a0 ... a7. DA UTILIZZARE OGGI: la convenzione di chiamata (Lezione 18) e, usati senza essere studiati nel corso, gli strumenti di PRG32, le chiamate del runtime PRG32, il debugger di PRG32-QT. DA COMPRENDERE PIÙ AVANTI: niente. Una slide senza etichetta è contesto: una storia, un esempio, una domanda, un esercizio.
 Per il docente: Secondo tutorial del progetto. Usa le Lezioni da 08 a 11: operatori booleani e tabelle di verità (08), XOR e uguaglianza, semplificazione (09), pulsanti come interruttori con pull-up (10), comparatori, multiplexer e ROM come tabella (11). Gli studenti partono dalla propria Parte 1 funzionante; il file di riferimento è verm1/verm1_part2.S.</a:t>
             </a:r>
             <a:endParaRPr lang="en-US" dirty="0"/>
@@ -642,6 +644,7 @@
             <a:r>
               <a:rPr lang="en-US" dirty="0"/>
               <a:t>Le variabili si possono leggere anche in memoria. Dopo la t0, dir il registro t0 contiene l'indirizzo di dir: scrivetelo nel campo Memory. Le variabili si susseguono nell'ordine del file, quattro byte ciascuna: dir, want, step_q8, score, food_x, food_y. Mangiate una volta, mettete in pausa e leggete il punteggio: 01 00 00 00, il byte meno significativo per primo. Poi leggete la posizione del cibo e confrontatela con la cella rossa sullo schermo.
+DA UTILIZZARE OGGI: il debugger di PRG32-QT (si usa, non si studia, in questo corso).
 Per il docente: head_x e head_y sono le due parole prima di dir. Little-endian: il byte più basso viene per primo.</a:t>
             </a:r>
             <a:endParaRPr lang="en-US" dirty="0"/>
@@ -913,6 +916,7 @@
             <a:r>
               <a:rPr lang="en-US" dirty="0"/>
               <a:t>Dove siete. Il giocatore è nel gioco: un desiderio, una regola, un movimento, una ricompensa. La logica di quattro lezioni è diventata istruzioni: bit e maschere, XOR come comparatore, una tabella come selettore. Ma il verme non ha corpo, niente può andare storto, e il gioco non finisce mai. Il prossimo blocco, su stato e memoria, dà gli strumenti, e la Parte 3 aggiunge un corpo che cresce, le collisioni, una schermata del titolo e un game over.
+Stato di apprendimento, riepilogo. DA COMPRENDERE OGGI: le maschere di bit; i codici; gli array in memoria; gli ingressi con pull-up; l'algebra di Boole; la virgola fissa; i multiplexer; istruzioni con o senza segno; comparatori e parità; gli argomenti in a0 ... a7. DA UTILIZZARE OGGI: la convenzione di chiamata (Lezione 18) e, usati senza essere studiati nel corso, gli strumenti di PRG32, le chiamate del runtime PRG32, il debugger di PRG32-QT. DA COMPRENDERE PIÙ AVANTI: niente. Una slide senza etichetta è contesto: una storia, un esempio, una domanda, un esercizio.
 Per il docente: File di riferimento di questa parte: verm1/verm1_part2.S (231 righe).</a:t>
             </a:r>
             <a:endParaRPr lang="en-US" dirty="0"/>
@@ -1268,6 +1272,7 @@
             <a:r>
               <a:rPr lang="en-US" dirty="0"/>
               <a:t>I codici delle direzioni sono scelti con cura. Il bit 0 dice se il movimento è verticale; il bit 1 dice se è «all'indietro», verso coordinate minori. Di conseguenza una direzione e la sua opposta differiscono nel bit 1 e solo lì: RIGHT è 00 e LEFT è 10, DOWN è 01 e UP è 11. Quindi lo XOR di due direzioni opposte è sempre 10, cioè 2. Una buona codifica trasforma una regola in una sola porta. Notate anche la didascalia: sullo schermo y cresce verso il basso, quindi DOWN è più 1.
+DA COMPRENDERE OGGI: i codici.
 Per il docente: Il bit 0 dice verticale, il bit 1 dice all'indietro. Una direzione e la sua opposta differiscono nel bit 1 e solo lì: codice XOR opposta è sempre 10 in binario, cioè 2. Una buona codifica trasforma una regola in una sola porta: la lezione della Lezione 09.</a:t>
             </a:r>
             <a:endParaRPr lang="en-US" dirty="0"/>
@@ -1357,6 +1362,7 @@
             <a:r>
               <a:rPr lang="en-US" dirty="0"/>
               <a:t>Il percorso di un pulsante, dalla Lezione 10. Il piedino del chip è tenuto a 3,3 V da una resistenza di pull-up; premendo il pulsante lo si collega a massa, quindi il piedino legge 0 quando è premuto. Il runtime inverte i livelli e impacchetta tutti i pulsanti in una parola, in cui 1 significa premuto. La tabella dà la maschera di ogni pulsante di direzione. Due fatti da usare subito: UP e RIGHT premuti insieme danno 0x04 OR 0x02, cioè 0x06; e a0 AND 0x04 vale zero esattamente quando UP non è premuto.
+DA COMPRENDERE OGGI: gli ingressi con pull-up.
 Per il docente: Il kit ha pull-up interni di circa 45 kilohm; gli interruttori vanno a massa. La cartuccia non vede mai il livello elettrico: il runtime dà la stessa parola sulla scheda, su QEMU e su PRG32-QT.</a:t>
             </a:r>
             <a:endParaRPr lang="en-US" dirty="0"/>
@@ -1446,6 +1452,7 @@
             <a:r>
               <a:rPr lang="en-US" dirty="0"/>
               <a:t>La regola come tabella di verità: sei delle sue sedici righe. Con la testa che va a destra, chiedere RIGHT dà 00 e la testa prosegue; chiedere DOWN o UP dà 01 o 11, e gira; chiedere LEFT dà 10, cioè 2, e la richiesta è rifiutata. Lo stesso accade per DOWN e UP. Completate voi la tabella e contate i rifiuti: sono quattro, uno per direzione. Con codici scelti a caso la stessa regola richiederebbe quattro confronti distinti.
+DA COMPRENDERE OGGI: l'algebra di Boole.
 Per il docente: Sedici righe in tutto: chiedere agli studenti di completare la tabella e di contare i rifiuti. Sono quattro, uno per direzione. Senza la codifica accurata la regola richiederebbe quattro confronti.</a:t>
             </a:r>
             <a:endParaRPr lang="en-US" dirty="0"/>
@@ -1535,6 +1542,7 @@
             <a:r>
               <a:rPr lang="en-US" dirty="0"/>
               <a:t>Eseguite la cartuccia in modalità debug e mostrate verm1_update. Guardate prima la telemetria mentre tenete premuto un pulsante: la maschera di ingresso mostra 0x04 per UP e 0x01 per LEFT. Poi mettete un breakpoint sull'istruzione xor t3, t2, t1. Tenete premuto LEFT mentre la testa va a destra e riprendete: il programma si ferma sullo XOR. Leggete i registri: t1 vale 0, la direzione, e t2 vale 2, il desiderio. Un passo: t3 diventa 2. Altri due passi, e vedete il salto avvenire e la sw saltata.
+DA UTILIZZARE OGGI: il debugger di PRG32-QT (si usa, non si studia, in questo corso).
 Per il docente: Abbassare la velocità del debugger a 0.25x se serve tempo per premere. Resume ignora una volta il breakpoint corrente: ogni Resume esegue un frame. Senza pulsanti premuti t2 è il desiderio precedente e t3 vale 0.</a:t>
             </a:r>
             <a:endParaRPr lang="en-US" dirty="0"/>
@@ -1624,6 +1632,7 @@
             <a:r>
               <a:rPr lang="en-US" dirty="0"/>
               <a:t>Ciò che dovreste leggere, con la testa che va a destra. Senza pulsanti premuti il desiderio è quello precedente e lo XOR vale 0. Con DOWN vale 1 e con UP vale 3: entrambi vengono memorizzati. Con LEFT vale 2, l'inversione a U, e non si memorizza nulla. L'ultima riga mostra la priorità tra i test: con UP e RIGHT insieme vince UP, perché è esaminato per ultimo. Leggete a0 alla prima istruzione dopo la chiamata: più avanti nel frame viene sovrascritto.
+DA UTILIZZARE OGGI: il debugger di PRG32-QT (si usa, non si studia, in questo corso).
 Per il docente: Tutte con la testa che va a destra. L'ultima riga mostra la priorità dei test: UP è esaminato per ultimo e vince. a0 viene sovrascritto più avanti nel frame: va letto alla prima istruzione dopo la chiamata.</a:t>
             </a:r>
             <a:endParaRPr lang="en-US" dirty="0"/>
@@ -2800,6 +2809,420 @@
       </p:pic>
       <p:sp>
         <p:nvSpPr>
+          <p:cNvPr id="16" name="Shape 13"/>
+          <p:cNvSpPr/>
+          <p:nvPr/>
+        </p:nvSpPr>
+        <p:spPr>
+          <a:xfrm>
+            <a:off x="8910777" y="91440"/>
+            <a:ext cx="2732278" cy="274320"/>
+          </a:xfrm>
+          <a:prstGeom prst="rect">
+            <a:avLst/>
+          </a:prstGeom>
+          <a:solidFill>
+            <a:srgbClr val="F3E8FF"/>
+          </a:solidFill>
+          <a:ln w="12700">
+            <a:solidFill>
+              <a:srgbClr val="7E22CE"/>
+            </a:solidFill>
+            <a:prstDash val="dash"/>
+          </a:ln>
+        </p:spPr>
+      </p:sp>
+      <p:sp>
+        <p:nvSpPr>
+          <p:cNvPr id="17" name="Shape 14"/>
+          <p:cNvSpPr/>
+          <p:nvPr/>
+        </p:nvSpPr>
+        <p:spPr>
+          <a:xfrm>
+            <a:off x="8938209" y="128016"/>
+            <a:ext cx="45720" cy="45720"/>
+          </a:xfrm>
+          <a:prstGeom prst="rect">
+            <a:avLst/>
+          </a:prstGeom>
+          <a:solidFill>
+            <a:srgbClr val="7E22CE"/>
+          </a:solidFill>
+          <a:ln w="12700">
+            <a:solidFill>
+              <a:srgbClr val="7E22CE"/>
+            </a:solidFill>
+            <a:prstDash val="solid"/>
+          </a:ln>
+        </p:spPr>
+      </p:sp>
+      <p:sp>
+        <p:nvSpPr>
+          <p:cNvPr id="18" name="Shape 15"/>
+          <p:cNvSpPr/>
+          <p:nvPr/>
+        </p:nvSpPr>
+        <p:spPr>
+          <a:xfrm>
+            <a:off x="8938209" y="205740"/>
+            <a:ext cx="45720" cy="45720"/>
+          </a:xfrm>
+          <a:prstGeom prst="rect">
+            <a:avLst/>
+          </a:prstGeom>
+          <a:solidFill>
+            <a:srgbClr val="7E22CE"/>
+          </a:solidFill>
+          <a:ln w="12700">
+            <a:solidFill>
+              <a:srgbClr val="7E22CE"/>
+            </a:solidFill>
+            <a:prstDash val="solid"/>
+          </a:ln>
+        </p:spPr>
+      </p:sp>
+      <p:sp>
+        <p:nvSpPr>
+          <p:cNvPr id="19" name="Shape 16"/>
+          <p:cNvSpPr/>
+          <p:nvPr/>
+        </p:nvSpPr>
+        <p:spPr>
+          <a:xfrm>
+            <a:off x="8938209" y="283464"/>
+            <a:ext cx="45720" cy="45720"/>
+          </a:xfrm>
+          <a:prstGeom prst="rect">
+            <a:avLst/>
+          </a:prstGeom>
+          <a:solidFill>
+            <a:srgbClr val="7E22CE"/>
+          </a:solidFill>
+          <a:ln w="12700">
+            <a:solidFill>
+              <a:srgbClr val="7E22CE"/>
+            </a:solidFill>
+            <a:prstDash val="solid"/>
+          </a:ln>
+        </p:spPr>
+      </p:sp>
+      <p:pic>
+        <p:nvPicPr>
+          <p:cNvPr id="20" name="Image 1" descr="preencoded.png">    </p:cNvPr>
+          <p:cNvPicPr>
+            <a:picLocks noChangeAspect="1"/>
+          </p:cNvPicPr>
+          <p:nvPr/>
+        </p:nvPicPr>
+        <p:blipFill>
+          <a:blip r:embed="rId2"/>
+          <a:stretch>
+            <a:fillRect/>
+          </a:stretch>
+        </p:blipFill>
+        <p:spPr>
+          <a:xfrm>
+            <a:off x="9038793" y="128016"/>
+            <a:ext cx="201168" cy="201168"/>
+          </a:xfrm>
+          <a:prstGeom prst="rect">
+            <a:avLst/>
+          </a:prstGeom>
+        </p:spPr>
+      </p:pic>
+      <p:sp>
+        <p:nvSpPr>
+          <p:cNvPr id="21" name="Text 17"/>
+          <p:cNvSpPr txBox="1"/>
+          <p:nvPr/>
+        </p:nvSpPr>
+        <p:spPr>
+          <a:xfrm>
+            <a:off x="9294825" y="91440"/>
+            <a:ext cx="2311654" cy="274320"/>
+          </a:xfrm>
+          <a:prstGeom prst="rect">
+            <a:avLst/>
+          </a:prstGeom>
+          <a:noFill/>
+          <a:ln/>
+        </p:spPr>
+        <p:txBody>
+          <a:bodyPr wrap="square" lIns="0" tIns="0" rIns="0" bIns="0" rtlCol="0" anchor="ctr"/>
+          <a:lstStyle/>
+          <a:p>
+            <a:pPr indent="0" marL="0">
+              <a:buNone/>
+            </a:pPr>
+            <a:r>
+              <a:rPr lang="en-US" sz="1100" b="1" dirty="0">
+                <a:solidFill>
+                  <a:srgbClr val="6B21A8"/>
+                </a:solidFill>
+                <a:latin typeface="Calibri" pitchFamily="34" charset="0"/>
+                <a:ea typeface="Calibri" pitchFamily="34" charset="-122"/>
+                <a:cs typeface="Calibri" pitchFamily="34" charset="-120"/>
+              </a:rPr>
+              <a:t>DA COMPRENDERE PIÙ AVANTI</a:t>
+            </a:r>
+            <a:endParaRPr lang="en-US" sz="1100" dirty="0"/>
+          </a:p>
+        </p:txBody>
+      </p:sp>
+      <p:sp>
+        <p:nvSpPr>
+          <p:cNvPr id="22" name="Shape 18"/>
+          <p:cNvSpPr/>
+          <p:nvPr/>
+        </p:nvSpPr>
+        <p:spPr>
+          <a:xfrm>
+            <a:off x="6675069" y="91440"/>
+            <a:ext cx="2125980" cy="274320"/>
+          </a:xfrm>
+          <a:prstGeom prst="rect">
+            <a:avLst/>
+          </a:prstGeom>
+          <a:solidFill>
+            <a:srgbClr val="FEF3C7"/>
+          </a:solidFill>
+          <a:ln w="12700">
+            <a:solidFill>
+              <a:srgbClr val="B45309"/>
+            </a:solidFill>
+            <a:prstDash val="solid"/>
+          </a:ln>
+        </p:spPr>
+      </p:sp>
+      <p:sp>
+        <p:nvSpPr>
+          <p:cNvPr id="23" name="Shape 19"/>
+          <p:cNvSpPr/>
+          <p:nvPr/>
+        </p:nvSpPr>
+        <p:spPr>
+          <a:xfrm>
+            <a:off x="6675069" y="91440"/>
+            <a:ext cx="27432" cy="274320"/>
+          </a:xfrm>
+          <a:prstGeom prst="rect">
+            <a:avLst/>
+          </a:prstGeom>
+          <a:solidFill>
+            <a:srgbClr val="B45309"/>
+          </a:solidFill>
+          <a:ln w="12700">
+            <a:solidFill>
+              <a:srgbClr val="B45309"/>
+            </a:solidFill>
+            <a:prstDash val="solid"/>
+          </a:ln>
+        </p:spPr>
+      </p:sp>
+      <p:sp>
+        <p:nvSpPr>
+          <p:cNvPr id="24" name="Shape 20"/>
+          <p:cNvSpPr/>
+          <p:nvPr/>
+        </p:nvSpPr>
+        <p:spPr>
+          <a:xfrm>
+            <a:off x="6729933" y="91440"/>
+            <a:ext cx="27432" cy="274320"/>
+          </a:xfrm>
+          <a:prstGeom prst="rect">
+            <a:avLst/>
+          </a:prstGeom>
+          <a:solidFill>
+            <a:srgbClr val="B45309"/>
+          </a:solidFill>
+          <a:ln w="12700">
+            <a:solidFill>
+              <a:srgbClr val="B45309"/>
+            </a:solidFill>
+            <a:prstDash val="solid"/>
+          </a:ln>
+        </p:spPr>
+      </p:sp>
+      <p:pic>
+        <p:nvPicPr>
+          <p:cNvPr id="25" name="Image 2" descr="preencoded.png">    </p:cNvPr>
+          <p:cNvPicPr>
+            <a:picLocks noChangeAspect="1"/>
+          </p:cNvPicPr>
+          <p:nvPr/>
+        </p:nvPicPr>
+        <p:blipFill>
+          <a:blip r:embed="rId3"/>
+          <a:stretch>
+            <a:fillRect/>
+          </a:stretch>
+        </p:blipFill>
+        <p:spPr>
+          <a:xfrm>
+            <a:off x="6803085" y="128016"/>
+            <a:ext cx="201168" cy="201168"/>
+          </a:xfrm>
+          <a:prstGeom prst="rect">
+            <a:avLst/>
+          </a:prstGeom>
+        </p:spPr>
+      </p:pic>
+      <p:sp>
+        <p:nvSpPr>
+          <p:cNvPr id="26" name="Text 21"/>
+          <p:cNvSpPr txBox="1"/>
+          <p:nvPr/>
+        </p:nvSpPr>
+        <p:spPr>
+          <a:xfrm>
+            <a:off x="7059117" y="91440"/>
+            <a:ext cx="1705356" cy="274320"/>
+          </a:xfrm>
+          <a:prstGeom prst="rect">
+            <a:avLst/>
+          </a:prstGeom>
+          <a:noFill/>
+          <a:ln/>
+        </p:spPr>
+        <p:txBody>
+          <a:bodyPr wrap="square" lIns="0" tIns="0" rIns="0" bIns="0" rtlCol="0" anchor="ctr"/>
+          <a:lstStyle/>
+          <a:p>
+            <a:pPr indent="0" marL="0">
+              <a:buNone/>
+            </a:pPr>
+            <a:r>
+              <a:rPr lang="en-US" sz="1100" b="1" dirty="0">
+                <a:solidFill>
+                  <a:srgbClr val="92400E"/>
+                </a:solidFill>
+                <a:latin typeface="Calibri" pitchFamily="34" charset="0"/>
+                <a:ea typeface="Calibri" pitchFamily="34" charset="-122"/>
+                <a:cs typeface="Calibri" pitchFamily="34" charset="-120"/>
+              </a:rPr>
+              <a:t>DA UTILIZZARE OGGI</a:t>
+            </a:r>
+            <a:endParaRPr lang="en-US" sz="1100" dirty="0"/>
+          </a:p>
+        </p:txBody>
+      </p:sp>
+      <p:sp>
+        <p:nvSpPr>
+          <p:cNvPr id="27" name="Shape 22"/>
+          <p:cNvSpPr/>
+          <p:nvPr/>
+        </p:nvSpPr>
+        <p:spPr>
+          <a:xfrm>
+            <a:off x="4352747" y="91440"/>
+            <a:ext cx="2212594" cy="274320"/>
+          </a:xfrm>
+          <a:prstGeom prst="rect">
+            <a:avLst/>
+          </a:prstGeom>
+          <a:solidFill>
+            <a:srgbClr val="E0F2FE"/>
+          </a:solidFill>
+          <a:ln w="12700">
+            <a:solidFill>
+              <a:srgbClr val="0369A1"/>
+            </a:solidFill>
+            <a:prstDash val="solid"/>
+          </a:ln>
+        </p:spPr>
+      </p:sp>
+      <p:sp>
+        <p:nvSpPr>
+          <p:cNvPr id="28" name="Shape 23"/>
+          <p:cNvSpPr/>
+          <p:nvPr/>
+        </p:nvSpPr>
+        <p:spPr>
+          <a:xfrm>
+            <a:off x="4352747" y="91440"/>
+            <a:ext cx="73152" cy="274320"/>
+          </a:xfrm>
+          <a:prstGeom prst="rect">
+            <a:avLst/>
+          </a:prstGeom>
+          <a:solidFill>
+            <a:srgbClr val="0369A1"/>
+          </a:solidFill>
+          <a:ln w="12700">
+            <a:solidFill>
+              <a:srgbClr val="0369A1"/>
+            </a:solidFill>
+            <a:prstDash val="solid"/>
+          </a:ln>
+        </p:spPr>
+      </p:sp>
+      <p:pic>
+        <p:nvPicPr>
+          <p:cNvPr id="29" name="Image 3" descr="preencoded.png">    </p:cNvPr>
+          <p:cNvPicPr>
+            <a:picLocks noChangeAspect="1"/>
+          </p:cNvPicPr>
+          <p:nvPr/>
+        </p:nvPicPr>
+        <p:blipFill>
+          <a:blip r:embed="rId4"/>
+          <a:stretch>
+            <a:fillRect/>
+          </a:stretch>
+        </p:blipFill>
+        <p:spPr>
+          <a:xfrm>
+            <a:off x="4480763" y="128016"/>
+            <a:ext cx="201168" cy="201168"/>
+          </a:xfrm>
+          <a:prstGeom prst="rect">
+            <a:avLst/>
+          </a:prstGeom>
+        </p:spPr>
+      </p:pic>
+      <p:sp>
+        <p:nvSpPr>
+          <p:cNvPr id="30" name="Text 24"/>
+          <p:cNvSpPr txBox="1"/>
+          <p:nvPr/>
+        </p:nvSpPr>
+        <p:spPr>
+          <a:xfrm>
+            <a:off x="4736795" y="91440"/>
+            <a:ext cx="1791970" cy="274320"/>
+          </a:xfrm>
+          <a:prstGeom prst="rect">
+            <a:avLst/>
+          </a:prstGeom>
+          <a:noFill/>
+          <a:ln/>
+        </p:spPr>
+        <p:txBody>
+          <a:bodyPr wrap="square" lIns="0" tIns="0" rIns="0" bIns="0" rtlCol="0" anchor="ctr"/>
+          <a:lstStyle/>
+          <a:p>
+            <a:pPr indent="0" marL="0">
+              <a:buNone/>
+            </a:pPr>
+            <a:r>
+              <a:rPr lang="en-US" sz="1100" b="1" dirty="0">
+                <a:solidFill>
+                  <a:srgbClr val="075985"/>
+                </a:solidFill>
+                <a:latin typeface="Calibri" pitchFamily="34" charset="0"/>
+                <a:ea typeface="Calibri" pitchFamily="34" charset="-122"/>
+                <a:cs typeface="Calibri" pitchFamily="34" charset="-120"/>
+              </a:rPr>
+              <a:t>DA COMPRENDERE OGGI</a:t>
+            </a:r>
+            <a:endParaRPr lang="en-US" sz="1100" dirty="0"/>
+          </a:p>
+        </p:txBody>
+      </p:sp>
+      <p:sp>
+        <p:nvSpPr>
           <p:cNvPr id="25" name="Slide Number Placeholder 0"/>
           <p:cNvSpPr>
             <a:spLocks noGrp="1"/>
@@ -3352,6 +3775,158 @@
       </p:sp>
       <p:sp>
         <p:nvSpPr>
+          <p:cNvPr id="15" name="Shape 12"/>
+          <p:cNvSpPr/>
+          <p:nvPr/>
+        </p:nvSpPr>
+        <p:spPr>
+          <a:xfrm>
+            <a:off x="7809941" y="91440"/>
+            <a:ext cx="3833114" cy="274320"/>
+          </a:xfrm>
+          <a:prstGeom prst="rect">
+            <a:avLst/>
+          </a:prstGeom>
+          <a:solidFill>
+            <a:srgbClr val="FEF3C7"/>
+          </a:solidFill>
+          <a:ln w="12700">
+            <a:solidFill>
+              <a:srgbClr val="B45309"/>
+            </a:solidFill>
+            <a:prstDash val="solid"/>
+          </a:ln>
+        </p:spPr>
+      </p:sp>
+      <p:sp>
+        <p:nvSpPr>
+          <p:cNvPr id="16" name="Shape 13"/>
+          <p:cNvSpPr/>
+          <p:nvPr/>
+        </p:nvSpPr>
+        <p:spPr>
+          <a:xfrm>
+            <a:off x="7809941" y="91440"/>
+            <a:ext cx="27432" cy="274320"/>
+          </a:xfrm>
+          <a:prstGeom prst="rect">
+            <a:avLst/>
+          </a:prstGeom>
+          <a:solidFill>
+            <a:srgbClr val="B45309"/>
+          </a:solidFill>
+          <a:ln w="12700">
+            <a:solidFill>
+              <a:srgbClr val="B45309"/>
+            </a:solidFill>
+            <a:prstDash val="solid"/>
+          </a:ln>
+        </p:spPr>
+      </p:sp>
+      <p:sp>
+        <p:nvSpPr>
+          <p:cNvPr id="17" name="Shape 14"/>
+          <p:cNvSpPr/>
+          <p:nvPr/>
+        </p:nvSpPr>
+        <p:spPr>
+          <a:xfrm>
+            <a:off x="7864805" y="91440"/>
+            <a:ext cx="27432" cy="274320"/>
+          </a:xfrm>
+          <a:prstGeom prst="rect">
+            <a:avLst/>
+          </a:prstGeom>
+          <a:solidFill>
+            <a:srgbClr val="B45309"/>
+          </a:solidFill>
+          <a:ln w="12700">
+            <a:solidFill>
+              <a:srgbClr val="B45309"/>
+            </a:solidFill>
+            <a:prstDash val="solid"/>
+          </a:ln>
+        </p:spPr>
+      </p:sp>
+      <p:pic>
+        <p:nvPicPr>
+          <p:cNvPr id="18" name="Image 1" descr="preencoded.png">    </p:cNvPr>
+          <p:cNvPicPr>
+            <a:picLocks noChangeAspect="1"/>
+          </p:cNvPicPr>
+          <p:nvPr/>
+        </p:nvPicPr>
+        <p:blipFill>
+          <a:blip r:embed="rId2"/>
+          <a:stretch>
+            <a:fillRect/>
+          </a:stretch>
+        </p:blipFill>
+        <p:spPr>
+          <a:xfrm>
+            <a:off x="7937957" y="128016"/>
+            <a:ext cx="201168" cy="201168"/>
+          </a:xfrm>
+          <a:prstGeom prst="rect">
+            <a:avLst/>
+          </a:prstGeom>
+        </p:spPr>
+      </p:pic>
+      <p:sp>
+        <p:nvSpPr>
+          <p:cNvPr id="19" name="Text 15"/>
+          <p:cNvSpPr txBox="1"/>
+          <p:nvPr/>
+        </p:nvSpPr>
+        <p:spPr>
+          <a:xfrm>
+            <a:off x="8193989" y="91440"/>
+            <a:ext cx="3412490" cy="274320"/>
+          </a:xfrm>
+          <a:prstGeom prst="rect">
+            <a:avLst/>
+          </a:prstGeom>
+          <a:noFill/>
+          <a:ln/>
+        </p:spPr>
+        <p:txBody>
+          <a:bodyPr wrap="square" lIns="0" tIns="0" rIns="0" bIns="0" rtlCol="0" anchor="ctr"/>
+          <a:lstStyle/>
+          <a:p>
+            <a:pPr indent="0" marL="0">
+              <a:buNone/>
+            </a:pPr>
+            <a:r>
+              <a:rPr lang="en-US" sz="1100" b="1" dirty="0">
+                <a:solidFill>
+                  <a:srgbClr val="92400E"/>
+                </a:solidFill>
+                <a:latin typeface="Calibri" pitchFamily="34" charset="0"/>
+                <a:ea typeface="Calibri" pitchFamily="34" charset="-122"/>
+                <a:cs typeface="Calibri" pitchFamily="34" charset="-120"/>
+              </a:rPr>
+              <a:t>DA UTILIZZARE OGGI</a:t>
+            </a:r>
+            <a:pPr indent="0" marL="0">
+              <a:buNone/>
+            </a:pPr>
+            <a:r>
+              <a:rPr lang="en-US" sz="1100" dirty="0">
+                <a:solidFill>
+                  <a:srgbClr val="92400E"/>
+                </a:solidFill>
+                <a:latin typeface="Calibri" pitchFamily="34" charset="0"/>
+                <a:ea typeface="Calibri" pitchFamily="34" charset="-122"/>
+                <a:cs typeface="Calibri" pitchFamily="34" charset="-120"/>
+              </a:rPr>
+              <a:t> · il debugger di PRG32-QT</a:t>
+            </a:r>
+            <a:endParaRPr lang="en-US" sz="1100" dirty="0"/>
+          </a:p>
+        </p:txBody>
+      </p:sp>
+      <p:sp>
+        <p:nvSpPr>
           <p:cNvPr id="25" name="Slide Number Placeholder 0"/>
           <p:cNvSpPr>
             <a:spLocks noGrp="1"/>
@@ -11211,6 +11786,133 @@
       </p:sp>
       <p:sp>
         <p:nvSpPr>
+          <p:cNvPr id="5" name="Shape 2"/>
+          <p:cNvSpPr/>
+          <p:nvPr/>
+        </p:nvSpPr>
+        <p:spPr>
+          <a:xfrm>
+            <a:off x="8708212" y="91440"/>
+            <a:ext cx="2934843" cy="274320"/>
+          </a:xfrm>
+          <a:prstGeom prst="rect">
+            <a:avLst/>
+          </a:prstGeom>
+          <a:solidFill>
+            <a:srgbClr val="E0F2FE"/>
+          </a:solidFill>
+          <a:ln w="12700">
+            <a:solidFill>
+              <a:srgbClr val="0369A1"/>
+            </a:solidFill>
+            <a:prstDash val="solid"/>
+          </a:ln>
+        </p:spPr>
+      </p:sp>
+      <p:sp>
+        <p:nvSpPr>
+          <p:cNvPr id="6" name="Shape 3"/>
+          <p:cNvSpPr/>
+          <p:nvPr/>
+        </p:nvSpPr>
+        <p:spPr>
+          <a:xfrm>
+            <a:off x="8708212" y="91440"/>
+            <a:ext cx="73152" cy="274320"/>
+          </a:xfrm>
+          <a:prstGeom prst="rect">
+            <a:avLst/>
+          </a:prstGeom>
+          <a:solidFill>
+            <a:srgbClr val="0369A1"/>
+          </a:solidFill>
+          <a:ln w="12700">
+            <a:solidFill>
+              <a:srgbClr val="0369A1"/>
+            </a:solidFill>
+            <a:prstDash val="solid"/>
+          </a:ln>
+        </p:spPr>
+      </p:sp>
+      <p:pic>
+        <p:nvPicPr>
+          <p:cNvPr id="7" name="Image 0" descr="preencoded.png">    </p:cNvPr>
+          <p:cNvPicPr>
+            <a:picLocks noChangeAspect="1"/>
+          </p:cNvPicPr>
+          <p:nvPr/>
+        </p:nvPicPr>
+        <p:blipFill>
+          <a:blip r:embed="rId1"/>
+          <a:stretch>
+            <a:fillRect/>
+          </a:stretch>
+        </p:blipFill>
+        <p:spPr>
+          <a:xfrm>
+            <a:off x="8836228" y="128016"/>
+            <a:ext cx="201168" cy="201168"/>
+          </a:xfrm>
+          <a:prstGeom prst="rect">
+            <a:avLst/>
+          </a:prstGeom>
+        </p:spPr>
+      </p:pic>
+      <p:sp>
+        <p:nvSpPr>
+          <p:cNvPr id="8" name="Text 4"/>
+          <p:cNvSpPr txBox="1"/>
+          <p:nvPr/>
+        </p:nvSpPr>
+        <p:spPr>
+          <a:xfrm>
+            <a:off x="9092260" y="91440"/>
+            <a:ext cx="2514219" cy="274320"/>
+          </a:xfrm>
+          <a:prstGeom prst="rect">
+            <a:avLst/>
+          </a:prstGeom>
+          <a:noFill/>
+          <a:ln/>
+        </p:spPr>
+        <p:txBody>
+          <a:bodyPr wrap="square" lIns="0" tIns="0" rIns="0" bIns="0" rtlCol="0" anchor="ctr"/>
+          <a:lstStyle/>
+          <a:p>
+            <a:pPr indent="0" marL="0">
+              <a:buNone/>
+            </a:pPr>
+            <a:r>
+              <a:rPr lang="en-US" sz="1100" b="1" dirty="0">
+                <a:solidFill>
+                  <a:srgbClr val="075985"/>
+                </a:solidFill>
+                <a:latin typeface="Calibri" pitchFamily="34" charset="0"/>
+                <a:ea typeface="Calibri" pitchFamily="34" charset="-122"/>
+                <a:cs typeface="Calibri" pitchFamily="34" charset="-120"/>
+              </a:rPr>
+              <a:t>DA COMPRENDERE OGGI</a:t>
+            </a:r>
+            <a:pPr indent="0" marL="0">
+              <a:buNone/>
+            </a:pPr>
+            <a:r>
+              <a:rPr lang="en-US" sz="1100" dirty="0">
+                <a:solidFill>
+                  <a:srgbClr val="075985"/>
+                </a:solidFill>
+                <a:latin typeface="Calibri" pitchFamily="34" charset="0"/>
+                <a:ea typeface="Calibri" pitchFamily="34" charset="-122"/>
+                <a:cs typeface="Calibri" pitchFamily="34" charset="-120"/>
+              </a:rPr>
+              <a:t> · i codici</a:t>
+            </a:r>
+            <a:endParaRPr lang="en-US" sz="1100" dirty="0"/>
+          </a:p>
+        </p:txBody>
+      </p:sp>
+      <p:sp>
+        <p:nvSpPr>
           <p:cNvPr id="25" name="Slide Number Placeholder 0"/>
           <p:cNvSpPr>
             <a:spLocks noGrp="1"/>
@@ -11323,9 +12025,59 @@
           </a:p>
         </p:txBody>
       </p:sp>
+      <p:sp>
+        <p:nvSpPr>
+          <p:cNvPr id="3" name="Shape 1"/>
+          <p:cNvSpPr/>
+          <p:nvPr/>
+        </p:nvSpPr>
+        <p:spPr>
+          <a:xfrm>
+            <a:off x="7657668" y="91440"/>
+            <a:ext cx="3985387" cy="274320"/>
+          </a:xfrm>
+          <a:prstGeom prst="rect">
+            <a:avLst/>
+          </a:prstGeom>
+          <a:solidFill>
+            <a:srgbClr val="E0F2FE"/>
+          </a:solidFill>
+          <a:ln w="12700">
+            <a:solidFill>
+              <a:srgbClr val="0369A1"/>
+            </a:solidFill>
+            <a:prstDash val="solid"/>
+          </a:ln>
+        </p:spPr>
+      </p:sp>
+      <p:sp>
+        <p:nvSpPr>
+          <p:cNvPr id="4" name="Shape 2"/>
+          <p:cNvSpPr/>
+          <p:nvPr/>
+        </p:nvSpPr>
+        <p:spPr>
+          <a:xfrm>
+            <a:off x="7657668" y="91440"/>
+            <a:ext cx="73152" cy="274320"/>
+          </a:xfrm>
+          <a:prstGeom prst="rect">
+            <a:avLst/>
+          </a:prstGeom>
+          <a:solidFill>
+            <a:srgbClr val="0369A1"/>
+          </a:solidFill>
+          <a:ln w="12700">
+            <a:solidFill>
+              <a:srgbClr val="0369A1"/>
+            </a:solidFill>
+            <a:prstDash val="solid"/>
+          </a:ln>
+        </p:spPr>
+      </p:sp>
       <p:pic>
         <p:nvPicPr>
-          <p:cNvPr id="4" name="Image 0" descr="preencoded.png">    </p:cNvPr>
+          <p:cNvPr id="5" name="Image 0" descr="preencoded.png">    </p:cNvPr>
           <p:cNvPicPr>
             <a:picLocks noChangeAspect="1"/>
           </p:cNvPicPr>
@@ -11333,6 +12085,83 @@
         </p:nvPicPr>
         <p:blipFill>
           <a:blip r:embed="rId1"/>
+          <a:stretch>
+            <a:fillRect/>
+          </a:stretch>
+        </p:blipFill>
+        <p:spPr>
+          <a:xfrm>
+            <a:off x="7785684" y="128016"/>
+            <a:ext cx="201168" cy="201168"/>
+          </a:xfrm>
+          <a:prstGeom prst="rect">
+            <a:avLst/>
+          </a:prstGeom>
+        </p:spPr>
+      </p:pic>
+      <p:sp>
+        <p:nvSpPr>
+          <p:cNvPr id="6" name="Text 3"/>
+          <p:cNvSpPr txBox="1"/>
+          <p:nvPr/>
+        </p:nvSpPr>
+        <p:spPr>
+          <a:xfrm>
+            <a:off x="8041716" y="91440"/>
+            <a:ext cx="3564763" cy="274320"/>
+          </a:xfrm>
+          <a:prstGeom prst="rect">
+            <a:avLst/>
+          </a:prstGeom>
+          <a:noFill/>
+          <a:ln/>
+        </p:spPr>
+        <p:txBody>
+          <a:bodyPr wrap="square" lIns="0" tIns="0" rIns="0" bIns="0" rtlCol="0" anchor="ctr"/>
+          <a:lstStyle/>
+          <a:p>
+            <a:pPr indent="0" marL="0">
+              <a:buNone/>
+            </a:pPr>
+            <a:r>
+              <a:rPr lang="en-US" sz="1100" b="1" dirty="0">
+                <a:solidFill>
+                  <a:srgbClr val="075985"/>
+                </a:solidFill>
+                <a:latin typeface="Calibri" pitchFamily="34" charset="0"/>
+                <a:ea typeface="Calibri" pitchFamily="34" charset="-122"/>
+                <a:cs typeface="Calibri" pitchFamily="34" charset="-120"/>
+              </a:rPr>
+              <a:t>DA COMPRENDERE OGGI</a:t>
+            </a:r>
+            <a:pPr indent="0" marL="0">
+              <a:buNone/>
+            </a:pPr>
+            <a:r>
+              <a:rPr lang="en-US" sz="1100" dirty="0">
+                <a:solidFill>
+                  <a:srgbClr val="075985"/>
+                </a:solidFill>
+                <a:latin typeface="Calibri" pitchFamily="34" charset="0"/>
+                <a:ea typeface="Calibri" pitchFamily="34" charset="-122"/>
+                <a:cs typeface="Calibri" pitchFamily="34" charset="-120"/>
+              </a:rPr>
+              <a:t> · gli ingressi con pull-up</a:t>
+            </a:r>
+            <a:endParaRPr lang="en-US" sz="1100" dirty="0"/>
+          </a:p>
+        </p:txBody>
+      </p:sp>
+      <p:pic>
+        <p:nvPicPr>
+          <p:cNvPr id="8" name="Image 1" descr="preencoded.png">    </p:cNvPr>
+          <p:cNvPicPr>
+            <a:picLocks noChangeAspect="1"/>
+          </p:cNvPicPr>
+          <p:nvPr/>
+        </p:nvPicPr>
+        <p:blipFill>
+          <a:blip r:embed="rId2"/>
           <a:stretch>
             <a:fillRect/>
           </a:stretch>
@@ -13025,7 +13854,7 @@
       </p:graphicFrame>
       <p:sp>
         <p:nvSpPr>
-          <p:cNvPr id="6" name="Shape 1"/>
+          <p:cNvPr id="10" name="Shape 4"/>
           <p:cNvSpPr/>
           <p:nvPr/>
         </p:nvSpPr>
@@ -13050,7 +13879,7 @@
       </p:sp>
       <p:sp>
         <p:nvSpPr>
-          <p:cNvPr id="7" name="Text 2"/>
+          <p:cNvPr id="11" name="Text 5"/>
           <p:cNvSpPr txBox="1"/>
           <p:nvPr/>
         </p:nvSpPr>
@@ -13092,7 +13921,7 @@
       </p:sp>
       <p:sp>
         <p:nvSpPr>
-          <p:cNvPr id="8" name="Shape 3"/>
+          <p:cNvPr id="12" name="Shape 6"/>
           <p:cNvSpPr/>
           <p:nvPr/>
         </p:nvSpPr>
@@ -13117,7 +13946,7 @@
       </p:sp>
       <p:sp>
         <p:nvSpPr>
-          <p:cNvPr id="9" name="Text 4"/>
+          <p:cNvPr id="13" name="Text 7"/>
           <p:cNvSpPr txBox="1"/>
           <p:nvPr/>
         </p:nvSpPr>
@@ -13159,7 +13988,7 @@
       </p:sp>
       <p:sp>
         <p:nvSpPr>
-          <p:cNvPr id="10" name="Shape 5"/>
+          <p:cNvPr id="14" name="Shape 8"/>
           <p:cNvSpPr/>
           <p:nvPr/>
         </p:nvSpPr>
@@ -13184,7 +14013,7 @@
       </p:sp>
       <p:sp>
         <p:nvSpPr>
-          <p:cNvPr id="11" name="Text 6"/>
+          <p:cNvPr id="15" name="Text 9"/>
           <p:cNvSpPr txBox="1"/>
           <p:nvPr/>
         </p:nvSpPr>
@@ -13226,7 +14055,7 @@
       </p:sp>
       <p:sp>
         <p:nvSpPr>
-          <p:cNvPr id="12" name="Shape 7"/>
+          <p:cNvPr id="16" name="Shape 10"/>
           <p:cNvSpPr/>
           <p:nvPr/>
         </p:nvSpPr>
@@ -13251,7 +14080,7 @@
       </p:sp>
       <p:sp>
         <p:nvSpPr>
-          <p:cNvPr id="13" name="Text 8"/>
+          <p:cNvPr id="17" name="Text 11"/>
           <p:cNvSpPr txBox="1"/>
           <p:nvPr/>
         </p:nvSpPr>
@@ -15873,6 +16702,133 @@
       </p:sp>
       <p:sp>
         <p:nvSpPr>
+          <p:cNvPr id="5" name="Shape 2"/>
+          <p:cNvSpPr/>
+          <p:nvPr/>
+        </p:nvSpPr>
+        <p:spPr>
+          <a:xfrm>
+            <a:off x="8051622" y="91440"/>
+            <a:ext cx="3591433" cy="274320"/>
+          </a:xfrm>
+          <a:prstGeom prst="rect">
+            <a:avLst/>
+          </a:prstGeom>
+          <a:solidFill>
+            <a:srgbClr val="E0F2FE"/>
+          </a:solidFill>
+          <a:ln w="12700">
+            <a:solidFill>
+              <a:srgbClr val="0369A1"/>
+            </a:solidFill>
+            <a:prstDash val="solid"/>
+          </a:ln>
+        </p:spPr>
+      </p:sp>
+      <p:sp>
+        <p:nvSpPr>
+          <p:cNvPr id="6" name="Shape 3"/>
+          <p:cNvSpPr/>
+          <p:nvPr/>
+        </p:nvSpPr>
+        <p:spPr>
+          <a:xfrm>
+            <a:off x="8051622" y="91440"/>
+            <a:ext cx="73152" cy="274320"/>
+          </a:xfrm>
+          <a:prstGeom prst="rect">
+            <a:avLst/>
+          </a:prstGeom>
+          <a:solidFill>
+            <a:srgbClr val="0369A1"/>
+          </a:solidFill>
+          <a:ln w="12700">
+            <a:solidFill>
+              <a:srgbClr val="0369A1"/>
+            </a:solidFill>
+            <a:prstDash val="solid"/>
+          </a:ln>
+        </p:spPr>
+      </p:sp>
+      <p:pic>
+        <p:nvPicPr>
+          <p:cNvPr id="7" name="Image 0" descr="preencoded.png">    </p:cNvPr>
+          <p:cNvPicPr>
+            <a:picLocks noChangeAspect="1"/>
+          </p:cNvPicPr>
+          <p:nvPr/>
+        </p:nvPicPr>
+        <p:blipFill>
+          <a:blip r:embed="rId1"/>
+          <a:stretch>
+            <a:fillRect/>
+          </a:stretch>
+        </p:blipFill>
+        <p:spPr>
+          <a:xfrm>
+            <a:off x="8179638" y="128016"/>
+            <a:ext cx="201168" cy="201168"/>
+          </a:xfrm>
+          <a:prstGeom prst="rect">
+            <a:avLst/>
+          </a:prstGeom>
+        </p:spPr>
+      </p:pic>
+      <p:sp>
+        <p:nvSpPr>
+          <p:cNvPr id="8" name="Text 4"/>
+          <p:cNvSpPr txBox="1"/>
+          <p:nvPr/>
+        </p:nvSpPr>
+        <p:spPr>
+          <a:xfrm>
+            <a:off x="8435670" y="91440"/>
+            <a:ext cx="3170809" cy="274320"/>
+          </a:xfrm>
+          <a:prstGeom prst="rect">
+            <a:avLst/>
+          </a:prstGeom>
+          <a:noFill/>
+          <a:ln/>
+        </p:spPr>
+        <p:txBody>
+          <a:bodyPr wrap="square" lIns="0" tIns="0" rIns="0" bIns="0" rtlCol="0" anchor="ctr"/>
+          <a:lstStyle/>
+          <a:p>
+            <a:pPr indent="0" marL="0">
+              <a:buNone/>
+            </a:pPr>
+            <a:r>
+              <a:rPr lang="en-US" sz="1100" b="1" dirty="0">
+                <a:solidFill>
+                  <a:srgbClr val="075985"/>
+                </a:solidFill>
+                <a:latin typeface="Calibri" pitchFamily="34" charset="0"/>
+                <a:ea typeface="Calibri" pitchFamily="34" charset="-122"/>
+                <a:cs typeface="Calibri" pitchFamily="34" charset="-120"/>
+              </a:rPr>
+              <a:t>DA COMPRENDERE OGGI</a:t>
+            </a:r>
+            <a:pPr indent="0" marL="0">
+              <a:buNone/>
+            </a:pPr>
+            <a:r>
+              <a:rPr lang="en-US" sz="1100" dirty="0">
+                <a:solidFill>
+                  <a:srgbClr val="075985"/>
+                </a:solidFill>
+                <a:latin typeface="Calibri" pitchFamily="34" charset="0"/>
+                <a:ea typeface="Calibri" pitchFamily="34" charset="-122"/>
+                <a:cs typeface="Calibri" pitchFamily="34" charset="-120"/>
+              </a:rPr>
+              <a:t> · l'algebra di Boole</a:t>
+            </a:r>
+            <a:endParaRPr lang="en-US" sz="1100" dirty="0"/>
+          </a:p>
+        </p:txBody>
+      </p:sp>
+      <p:sp>
+        <p:nvSpPr>
           <p:cNvPr id="25" name="Slide Number Placeholder 0"/>
           <p:cNvSpPr>
             <a:spLocks noGrp="1"/>
@@ -16516,6 +17472,158 @@
               <a:t>Premete Step: t3 diventa 2. Altri due passi: il salto avviene e la sw è saltata</a:t>
             </a:r>
             <a:endParaRPr lang="en-US" sz="2200" dirty="0"/>
+          </a:p>
+        </p:txBody>
+      </p:sp>
+      <p:sp>
+        <p:nvSpPr>
+          <p:cNvPr id="15" name="Shape 13"/>
+          <p:cNvSpPr/>
+          <p:nvPr/>
+        </p:nvSpPr>
+        <p:spPr>
+          <a:xfrm>
+            <a:off x="7809941" y="91440"/>
+            <a:ext cx="3833114" cy="274320"/>
+          </a:xfrm>
+          <a:prstGeom prst="rect">
+            <a:avLst/>
+          </a:prstGeom>
+          <a:solidFill>
+            <a:srgbClr val="FEF3C7"/>
+          </a:solidFill>
+          <a:ln w="12700">
+            <a:solidFill>
+              <a:srgbClr val="B45309"/>
+            </a:solidFill>
+            <a:prstDash val="solid"/>
+          </a:ln>
+        </p:spPr>
+      </p:sp>
+      <p:sp>
+        <p:nvSpPr>
+          <p:cNvPr id="16" name="Shape 14"/>
+          <p:cNvSpPr/>
+          <p:nvPr/>
+        </p:nvSpPr>
+        <p:spPr>
+          <a:xfrm>
+            <a:off x="7809941" y="91440"/>
+            <a:ext cx="27432" cy="274320"/>
+          </a:xfrm>
+          <a:prstGeom prst="rect">
+            <a:avLst/>
+          </a:prstGeom>
+          <a:solidFill>
+            <a:srgbClr val="B45309"/>
+          </a:solidFill>
+          <a:ln w="12700">
+            <a:solidFill>
+              <a:srgbClr val="B45309"/>
+            </a:solidFill>
+            <a:prstDash val="solid"/>
+          </a:ln>
+        </p:spPr>
+      </p:sp>
+      <p:sp>
+        <p:nvSpPr>
+          <p:cNvPr id="17" name="Shape 15"/>
+          <p:cNvSpPr/>
+          <p:nvPr/>
+        </p:nvSpPr>
+        <p:spPr>
+          <a:xfrm>
+            <a:off x="7864805" y="91440"/>
+            <a:ext cx="27432" cy="274320"/>
+          </a:xfrm>
+          <a:prstGeom prst="rect">
+            <a:avLst/>
+          </a:prstGeom>
+          <a:solidFill>
+            <a:srgbClr val="B45309"/>
+          </a:solidFill>
+          <a:ln w="12700">
+            <a:solidFill>
+              <a:srgbClr val="B45309"/>
+            </a:solidFill>
+            <a:prstDash val="solid"/>
+          </a:ln>
+        </p:spPr>
+      </p:sp>
+      <p:pic>
+        <p:nvPicPr>
+          <p:cNvPr id="18" name="Image 0" descr="preencoded.png">    </p:cNvPr>
+          <p:cNvPicPr>
+            <a:picLocks noChangeAspect="1"/>
+          </p:cNvPicPr>
+          <p:nvPr/>
+        </p:nvPicPr>
+        <p:blipFill>
+          <a:blip r:embed="rId1"/>
+          <a:stretch>
+            <a:fillRect/>
+          </a:stretch>
+        </p:blipFill>
+        <p:spPr>
+          <a:xfrm>
+            <a:off x="7937957" y="128016"/>
+            <a:ext cx="201168" cy="201168"/>
+          </a:xfrm>
+          <a:prstGeom prst="rect">
+            <a:avLst/>
+          </a:prstGeom>
+        </p:spPr>
+      </p:pic>
+      <p:sp>
+        <p:nvSpPr>
+          <p:cNvPr id="19" name="Text 16"/>
+          <p:cNvSpPr txBox="1"/>
+          <p:nvPr/>
+        </p:nvSpPr>
+        <p:spPr>
+          <a:xfrm>
+            <a:off x="8193989" y="91440"/>
+            <a:ext cx="3412490" cy="274320"/>
+          </a:xfrm>
+          <a:prstGeom prst="rect">
+            <a:avLst/>
+          </a:prstGeom>
+          <a:noFill/>
+          <a:ln/>
+        </p:spPr>
+        <p:txBody>
+          <a:bodyPr wrap="square" lIns="0" tIns="0" rIns="0" bIns="0" rtlCol="0" anchor="ctr"/>
+          <a:lstStyle/>
+          <a:p>
+            <a:pPr indent="0" marL="0">
+              <a:buNone/>
+            </a:pPr>
+            <a:r>
+              <a:rPr lang="en-US" sz="1100" b="1" dirty="0">
+                <a:solidFill>
+                  <a:srgbClr val="92400E"/>
+                </a:solidFill>
+                <a:latin typeface="Calibri" pitchFamily="34" charset="0"/>
+                <a:ea typeface="Calibri" pitchFamily="34" charset="-122"/>
+                <a:cs typeface="Calibri" pitchFamily="34" charset="-120"/>
+              </a:rPr>
+              <a:t>DA UTILIZZARE OGGI</a:t>
+            </a:r>
+            <a:pPr indent="0" marL="0">
+              <a:buNone/>
+            </a:pPr>
+            <a:r>
+              <a:rPr lang="en-US" sz="1100" dirty="0">
+                <a:solidFill>
+                  <a:srgbClr val="92400E"/>
+                </a:solidFill>
+                <a:latin typeface="Calibri" pitchFamily="34" charset="0"/>
+                <a:ea typeface="Calibri" pitchFamily="34" charset="-122"/>
+                <a:cs typeface="Calibri" pitchFamily="34" charset="-120"/>
+              </a:rPr>
+              <a:t> · il debugger di PRG32-QT</a:t>
+            </a:r>
+            <a:endParaRPr lang="en-US" sz="1100" dirty="0"/>
           </a:p>
         </p:txBody>
       </p:sp>
@@ -19127,6 +20235,158 @@
           </a:graphicData>
         </a:graphic>
       </p:graphicFrame>
+      <p:sp>
+        <p:nvSpPr>
+          <p:cNvPr id="4" name="Shape 1"/>
+          <p:cNvSpPr/>
+          <p:nvPr/>
+        </p:nvSpPr>
+        <p:spPr>
+          <a:xfrm>
+            <a:off x="7809941" y="91440"/>
+            <a:ext cx="3833114" cy="274320"/>
+          </a:xfrm>
+          <a:prstGeom prst="rect">
+            <a:avLst/>
+          </a:prstGeom>
+          <a:solidFill>
+            <a:srgbClr val="FEF3C7"/>
+          </a:solidFill>
+          <a:ln w="12700">
+            <a:solidFill>
+              <a:srgbClr val="B45309"/>
+            </a:solidFill>
+            <a:prstDash val="solid"/>
+          </a:ln>
+        </p:spPr>
+      </p:sp>
+      <p:sp>
+        <p:nvSpPr>
+          <p:cNvPr id="5" name="Shape 2"/>
+          <p:cNvSpPr/>
+          <p:nvPr/>
+        </p:nvSpPr>
+        <p:spPr>
+          <a:xfrm>
+            <a:off x="7809941" y="91440"/>
+            <a:ext cx="27432" cy="274320"/>
+          </a:xfrm>
+          <a:prstGeom prst="rect">
+            <a:avLst/>
+          </a:prstGeom>
+          <a:solidFill>
+            <a:srgbClr val="B45309"/>
+          </a:solidFill>
+          <a:ln w="12700">
+            <a:solidFill>
+              <a:srgbClr val="B45309"/>
+            </a:solidFill>
+            <a:prstDash val="solid"/>
+          </a:ln>
+        </p:spPr>
+      </p:sp>
+      <p:sp>
+        <p:nvSpPr>
+          <p:cNvPr id="6" name="Shape 3"/>
+          <p:cNvSpPr/>
+          <p:nvPr/>
+        </p:nvSpPr>
+        <p:spPr>
+          <a:xfrm>
+            <a:off x="7864805" y="91440"/>
+            <a:ext cx="27432" cy="274320"/>
+          </a:xfrm>
+          <a:prstGeom prst="rect">
+            <a:avLst/>
+          </a:prstGeom>
+          <a:solidFill>
+            <a:srgbClr val="B45309"/>
+          </a:solidFill>
+          <a:ln w="12700">
+            <a:solidFill>
+              <a:srgbClr val="B45309"/>
+            </a:solidFill>
+            <a:prstDash val="solid"/>
+          </a:ln>
+        </p:spPr>
+      </p:sp>
+      <p:pic>
+        <p:nvPicPr>
+          <p:cNvPr id="7" name="Image 0" descr="preencoded.png">    </p:cNvPr>
+          <p:cNvPicPr>
+            <a:picLocks noChangeAspect="1"/>
+          </p:cNvPicPr>
+          <p:nvPr/>
+        </p:nvPicPr>
+        <p:blipFill>
+          <a:blip r:embed="rId1"/>
+          <a:stretch>
+            <a:fillRect/>
+          </a:stretch>
+        </p:blipFill>
+        <p:spPr>
+          <a:xfrm>
+            <a:off x="7937957" y="128016"/>
+            <a:ext cx="201168" cy="201168"/>
+          </a:xfrm>
+          <a:prstGeom prst="rect">
+            <a:avLst/>
+          </a:prstGeom>
+        </p:spPr>
+      </p:pic>
+      <p:sp>
+        <p:nvSpPr>
+          <p:cNvPr id="8" name="Text 4"/>
+          <p:cNvSpPr txBox="1"/>
+          <p:nvPr/>
+        </p:nvSpPr>
+        <p:spPr>
+          <a:xfrm>
+            <a:off x="8193989" y="91440"/>
+            <a:ext cx="3412490" cy="274320"/>
+          </a:xfrm>
+          <a:prstGeom prst="rect">
+            <a:avLst/>
+          </a:prstGeom>
+          <a:noFill/>
+          <a:ln/>
+        </p:spPr>
+        <p:txBody>
+          <a:bodyPr wrap="square" lIns="0" tIns="0" rIns="0" bIns="0" rtlCol="0" anchor="ctr"/>
+          <a:lstStyle/>
+          <a:p>
+            <a:pPr indent="0" marL="0">
+              <a:buNone/>
+            </a:pPr>
+            <a:r>
+              <a:rPr lang="en-US" sz="1100" b="1" dirty="0">
+                <a:solidFill>
+                  <a:srgbClr val="92400E"/>
+                </a:solidFill>
+                <a:latin typeface="Calibri" pitchFamily="34" charset="0"/>
+                <a:ea typeface="Calibri" pitchFamily="34" charset="-122"/>
+                <a:cs typeface="Calibri" pitchFamily="34" charset="-120"/>
+              </a:rPr>
+              <a:t>DA UTILIZZARE OGGI</a:t>
+            </a:r>
+            <a:pPr indent="0" marL="0">
+              <a:buNone/>
+            </a:pPr>
+            <a:r>
+              <a:rPr lang="en-US" sz="1100" dirty="0">
+                <a:solidFill>
+                  <a:srgbClr val="92400E"/>
+                </a:solidFill>
+                <a:latin typeface="Calibri" pitchFamily="34" charset="0"/>
+                <a:ea typeface="Calibri" pitchFamily="34" charset="-122"/>
+                <a:cs typeface="Calibri" pitchFamily="34" charset="-120"/>
+              </a:rPr>
+              <a:t> · il debugger di PRG32-QT</a:t>
+            </a:r>
+            <a:endParaRPr lang="en-US" sz="1100" dirty="0"/>
+          </a:p>
+        </p:txBody>
+      </p:sp>
       <p:sp>
         <p:nvSpPr>
           <p:cNvPr id="25" name="Slide Number Placeholder 0"/>

--- a/it/slides/12-Architettura_dei_Calcolatori-Verm1_Parte_2.pptx
+++ b/it/slides/12-Architettura_dei_Calcolatori-Verm1_Parte_2.pptx
@@ -119,7 +119,7 @@
   <p:extLst>
     <p:ext uri="{521415D9-36F7-43E2-AB2F-B90AF26B5E84}">
       <p14:sectionLst xmlns:p14="http://schemas.microsoft.com/office/powerpoint/2010/main">
-        <p14:section name="Apertura" id="{a0407c6a-96ba-b436-6cdd-c1c9c28ae43c}">
+        <p14:section name="Apertura" id="{1c148d97-f39c-15d6-8a0a-390ce974f24f}">
           <p14:sldIdLst>
             <p14:sldId id="256"/>
             <p14:sldId id="257"/>
@@ -127,18 +127,18 @@
             <p14:sldId id="259"/>
           </p14:sldIdLst>
         </p14:section>
-        <p14:section name="Passo 1: nomi per i bit" id="{3fb426f7-3cd5-ece7-719d-7dab24e90bcd}">
+        <p14:section name="Passo 1: nomi per i bit" id="{cec0043d-6924-d23e-b44e-fb553bc43165}">
           <p14:sldIdLst>
             <p14:sldId id="260"/>
           </p14:sldIdLst>
         </p14:section>
-        <p14:section name="Passo 2: la guida" id="{4f0b1e4f-bfb5-dcda-7b35-f4a313d3e702}">
+        <p14:section name="Passo 2: la guida" id="{53d5c5d6-109a-02f1-4ce5-09bee49d137f}">
           <p14:sldIdLst>
             <p14:sldId id="261"/>
             <p14:sldId id="262"/>
           </p14:sldIdLst>
         </p14:section>
-        <p14:section name="Passo 4: osservare una decisione" id="{c76ec92f-1f7c-be92-2a6f-7a4a21cb9544}">
+        <p14:section name="Passo 4: osservare una decisione" id="{e65f6840-c113-8aa9-44a1-dcbc649d2bf5}">
           <p14:sldIdLst>
             <p14:sldId id="263"/>
             <p14:sldId id="264"/>

--- a/it/slides/12-Architettura_dei_Calcolatori-Verm1_Parte_2.pptx
+++ b/it/slides/12-Architettura_dei_Calcolatori-Verm1_Parte_2.pptx
@@ -119,7 +119,7 @@
   <p:extLst>
     <p:ext uri="{521415D9-36F7-43E2-AB2F-B90AF26B5E84}">
       <p14:sectionLst xmlns:p14="http://schemas.microsoft.com/office/powerpoint/2010/main">
-        <p14:section name="Apertura" id="{1c148d97-f39c-15d6-8a0a-390ce974f24f}">
+        <p14:section name="Apertura" id="{42b19098-a845-e9cd-051e-cdeb5cf6048c}">
           <p14:sldIdLst>
             <p14:sldId id="256"/>
             <p14:sldId id="257"/>
@@ -127,18 +127,18 @@
             <p14:sldId id="259"/>
           </p14:sldIdLst>
         </p14:section>
-        <p14:section name="Passo 1: nomi per i bit" id="{cec0043d-6924-d23e-b44e-fb553bc43165}">
+        <p14:section name="Passo 1: nomi per i bit" id="{e0c3c9df-e402-9451-a332-a2738cdbfd5c}">
           <p14:sldIdLst>
             <p14:sldId id="260"/>
           </p14:sldIdLst>
         </p14:section>
-        <p14:section name="Passo 2: la guida" id="{53d5c5d6-109a-02f1-4ce5-09bee49d137f}">
+        <p14:section name="Passo 2: la guida" id="{c929f522-bd17-8f4b-b4df-10d90f61dbe1}">
           <p14:sldIdLst>
             <p14:sldId id="261"/>
             <p14:sldId id="262"/>
           </p14:sldIdLst>
         </p14:section>
-        <p14:section name="Passo 4: osservare una decisione" id="{e65f6840-c113-8aa9-44a1-dcbc649d2bf5}">
+        <p14:section name="Passo 4: osservare una decisione" id="{adf81f93-6690-1f24-16b1-e0afcbffb08d}">
           <p14:sldIdLst>
             <p14:sldId id="263"/>
             <p14:sldId id="264"/>
@@ -552,7 +552,7 @@
           <a:p>
             <a:r>
               <a:rPr lang="en-US" dirty="0"/>
-              <a:t>Il secondo tutorial del progetto. Alla fine della Parte 1 la testa attraversava lo schermo da sola; oggi nel gioco entra il giocatore. Aggiungete la guida con il joystick, il cibo che compare a caso, un punteggio e un suono. Tutto poggia sulle quattro lezioni del blocco di logica: un pulsante è un bit selezionato da una maschera, la regola contro l'inversione a U è un solo XOR, il movimento si legge da una tabella come lo selezionerebbe un multiplexer. La frase di Sid Meier in copertina dice che cosa state aggiungendo: scelte.
+              <a:t>Il secondo tutorial del progetto. Alla fine della Parte 1 la testa attraversava lo schermo da sola; oggi entra in gioco il giocatore. Si aggiunge la guida con il joystick, insieme a un cibo che compare a caso, un punteggio e un suono. Tutto poggia sulle quattro lezioni del blocco di logica: un pulsante è un bit selezionato da una maschera, la regola che vieta l'inversione a U è un solo XOR, e il movimento si legge da una tabella come lo selezionerebbe un multiplexer. La frase di Sid Meier in copertina nomina ciò che si aggiunge: scelte che contano.
 Stato di apprendimento: DA COMPRENDERE OGGI, alla fine di questa lezione lo spiegate, lo seguite passo passo e lo applicate da soli; DA UTILIZZARE OGGI, oggi seguite e usate la ricetta; come funziona dentro si spiega più avanti, o non fa parte del corso; DA COMPRENDERE PIÙ AVANTI, riconoscete il nome e lo scopo; lo spiega una lezione successiva. Una slide senza etichetta è contesto: una storia, un esempio, una domanda, un esercizio.
 Stato di apprendimento di questa lezione. DA COMPRENDERE OGGI: le maschere di bit; i codici; gli array in memoria; gli ingressi con pull-up; l'algebra di Boole; la virgola fissa; i multiplexer; istruzioni con o senza segno; comparatori e parità; gli argomenti in a0 ... a7. DA UTILIZZARE OGGI: la convenzione di chiamata (Lezione 18) e, usati senza essere studiati nel corso, gli strumenti di PRG32, le chiamate del runtime PRG32, il debugger di PRG32-QT. DA COMPRENDERE PIÙ AVANTI: niente. Una slide senza etichetta è contesto: una storia, un esempio, una domanda, un esercizio.
 Per il docente: Secondo tutorial del progetto. Usa le Lezioni da 08 a 11: operatori booleani e tabelle di verità (08), XOR e uguaglianza, semplificazione (09), pulsanti come interruttori con pull-up (10), comparatori, multiplexer e ROM come tabella (11). Gli studenti partono dalla propria Parte 1 funzionante; il file di riferimento è verm1/verm1_part2.S.</a:t>
@@ -643,7 +643,7 @@
           <a:p>
             <a:r>
               <a:rPr lang="en-US" dirty="0"/>
-              <a:t>Le variabili si possono leggere anche in memoria. Dopo la t0, dir il registro t0 contiene l'indirizzo di dir: scrivetelo nel campo Memory. Le variabili si susseguono nell'ordine del file, quattro byte ciascuna: dir, want, step_q8, score, food_x, food_y. Mangiate una volta, mettete in pausa e leggete il punteggio: 01 00 00 00, il byte meno significativo per primo. Poi leggete la posizione del cibo e confrontatela con la cella rossa sullo schermo.
+              <a:t>Le variabili si possono leggere anche in memoria. Dopo la t0, dir, t0 contiene l'indirizzo di dir, che si inserisce nel campo Memory. Le variabili si susseguono nell'ordine del file, quattro byte ciascuna: dir, want, step_q8, score, food_x, food_y. Dopo che il verme ha mangiato una volta, si mette in pausa il programma e si legge il punteggio: 01 00 00 00, il byte meno significativo per primo. Si legge poi la posizione del cibo e la si confronta con la cella rossa sullo schermo, chiudendo il cerchio tra memoria e display.
 DA UTILIZZARE OGGI: il debugger di PRG32-QT (si usa, non si studia, in questo corso).
 Per il docente: head_x e head_y sono le due parole prima di dir. Little-endian: il byte più basso viene per primo.</a:t>
             </a:r>
@@ -733,8 +733,8 @@
           <a:p>
             <a:r>
               <a:rPr lang="en-US" dirty="0"/>
-              <a:t>Un bit per pulsante: DOWN è 0x08 e RIGHT è 0x02. Premuti insieme, i due bit valgono entrambi 1: l'OR delle due maschere.
-Applicate la regola: il desiderio rifiutato è quello il cui XOR con la direzione vale 2. La direzione è 3, cioè 11 in binario; quale codice ne differisce solo nel bit 1?
+              <a:t>Per la prima domanda: un bit per pulsante, DOWN vale 0x08 e RIGHT 0x02. Premuti insieme, entrambi i bit valgono 1, quindi il valore è l'OR delle due maschere.
+Per la seconda si applica la regola: la richiesta rifiutata è quella il cui XOR con la direzione corrente vale 2. La direzione è 3, 11 in binario; la domanda è quale codice ne differisca nel solo bit 1.
 Per il docente: 1. Risposta: C. 0x08 OR 0x02 = 0x0a: un bit per pulsante.
 2. Risposta: B. 3 XOR 1 = 2: DOWN è l'opposto di UP.</a:t>
             </a:r>
@@ -824,8 +824,8 @@
           <a:p>
             <a:r>
               <a:rPr lang="en-US" dirty="0"/>
-              <a:t>Le tabelle sono fatte di parole, e una parola sono quattro byte. L'elemento numero k sta a k per 4 byte dall'inizio della tabella, e uno scorrimento a sinistra di 2 moltiplica per 4.
-XOR dà 1 in ogni posizione in cui i due bit differiscono. Un risultato di tutti zeri significa che nessuna posizione differisce.
+              <a:t>Per la prima domanda: le tabelle sono fatte di parole, e una parola è di quattro byte. La voce k si trova a 4k byte dall'inizio della tabella, e uno scorrimento a sinistra di 2 moltiplica per 4.
+Per la seconda: lo XOR dà 1 in ogni posizione in cui i due bit differiscono, quindi un risultato tutto a zero significa che nessuna posizione differisce, cioè che i due valori sono uguali.
 Per il docente: 1. Risposta: B. Gli elementi sono parole: l'elemento k sta allo scostamento 4k.
 2. Risposta: C. XOR vale 1 dove i bit differiscono: nessuna differenza, tutti zeri.</a:t>
             </a:r>
@@ -915,7 +915,7 @@
           <a:p>
             <a:r>
               <a:rPr lang="en-US" dirty="0"/>
-              <a:t>Dove siete. Il giocatore è nel gioco: un desiderio, una regola, un movimento, una ricompensa. La logica di quattro lezioni è diventata istruzioni: bit e maschere, XOR come comparatore, una tabella come selettore. Ma il verme non ha corpo, niente può andare storto, e il gioco non finisce mai. Il prossimo blocco, su stato e memoria, dà gli strumenti, e la Parte 3 aggiunge un corpo che cresce, le collisioni, una schermata del titolo e un game over.
+              <a:t>La situazione attuale. Il giocatore è ora nel gioco: una richiesta, una regola, un movimento, una ricompensa. La logica di quattro lezioni è diventata istruzioni: bit e maschere, lo XOR come comparatore, una tabella come selettore. Eppure il verme non ha corpo, nulla può andare storto, e il gioco non finisce mai. Il prossimo blocco, su stato e memoria, fornisce i concetti necessari, e la Parte 3 aggiunge un corpo che cresce, le collisioni, una schermata del titolo e una di fine partita.
 Stato di apprendimento, riepilogo. DA COMPRENDERE OGGI: le maschere di bit; i codici; gli array in memoria; gli ingressi con pull-up; l'algebra di Boole; la virgola fissa; i multiplexer; istruzioni con o senza segno; comparatori e parità; gli argomenti in a0 ... a7. DA UTILIZZARE OGGI: la convenzione di chiamata (Lezione 18) e, usati senza essere studiati nel corso, gli strumenti di PRG32, le chiamate del runtime PRG32, il debugger di PRG32-QT. DA COMPRENDERE PIÙ AVANTI: niente. Una slide senza etichetta è contesto: una storia, un esempio, una domanda, un esercizio.
 Per il docente: File di riferimento di questa parte: verm1/verm1_part2.S (231 righe).</a:t>
             </a:r>
@@ -1005,7 +1005,7 @@
           <a:p>
             <a:r>
               <a:rPr lang="en-US" dirty="0"/>
-              <a:t>Cinque risultati: una testa che guidate in quattro direzioni; una regola che vieta l'inversione a U, scritta con uno XOR e un confronto; il movimento preso da due piccole tabelle invece che da quattro salti; il cibo che compare in una cella a caso, viene mangiato e ricompare; e un punteggio, disegnato come piccole tacche accanto al titolo, con un suono a ogni boccone. Notate che tre dei cinque sono modi di scrivere bene qualcosa, non solo di farlo funzionare.</a:t>
+              <a:t>Cinque risultati: una testa guidata in quattro direzioni; una regola che vieta l'inversione a U, scritta con uno XOR e un confronto; un movimento preso da due piccole tabelle invece che da quattro salti; un cibo che compare in una cella casuale, viene mangiato e ricompare; e un punteggio, disegnato come piccole tacche accanto al titolo, con un suono a ogni boccone. Tre dei cinque riguardano lo scrivere bene il programma più che il farlo semplicemente funzionare, e questa enfasi sulla qualità di una soluzione è voluta.</a:t>
             </a:r>
             <a:endParaRPr lang="en-US" dirty="0"/>
           </a:p>
@@ -1093,7 +1093,7 @@
           <a:p>
             <a:r>
               <a:rPr lang="en-US" dirty="0"/>
-              <a:t>Ogni riga collega un'idea delle lezioni di logica a un punto del programma di oggi. AND come maschera seleziona un pulsante dalla parola dei pulsanti. Una tabella di verità diventa il codice delle quattro direzioni. XOR, che vale 1 dove due bit differiscono, dà sia la regola dell'inversione a U sia il test di uguaglianza. Il pull-up della Lezione 10 spiega perché un pulsante premuto arriva come 1. Il comparatore, il multiplexer e la ROM della Lezione 11 diventano il test «testa sul cibo» e le tabelle dx e dy.
+              <a:t>Ogni riga collega un'idea delle lezioni di logica a un punto del programma di oggi. L'AND come maschera seleziona un pulsante dalla parola dei pulsanti. Una tavola di verità diventa il codice delle quattro direzioni. Lo XOR, che vale 1 dove due bit differiscono, fornisce sia la regola dell'inversione a U sia il test di uguaglianza. Il pull-up della Lezione 10 spiega perché un pulsante premuto arriva come 1. Il comparatore, il multiplexer e la ROM della Lezione 11 diventano il test "testa sul cibo" e le tabelle dx e dy. Il tutorial è dunque un'applicazione dell'intero blocco, non di una singola lezione.
 Per il docente: Ogni riga è qualcosa che gli studenti hanno visto come circuito. Oggi le stesse idee sono istruzioni.</a:t>
             </a:r>
             <a:endParaRPr lang="en-US" dirty="0"/>
@@ -1182,7 +1182,7 @@
           <a:p>
             <a:r>
               <a:rPr lang="en-US" dirty="0"/>
-              <a:t>Partite da una Parte 1 che gira: aprite il file, compilatelo e verificate che la testa attraversi lo schermo. Se non lo fa, prendete il file di riferimento della Parte 1. Oggi il file cambia in tre passi, e lo eseguite dopo il secondo e dopo il terzo. Leggete con attenzione la quarta riga, perché è la convenzione di tutti i tutorial da qui in poi: una slide con MODIFICATO sostituisce codice che avete già; una slide con NUOVO aggiunge codice.
+              <a:t>La sessione parte da una Parte 1 che gira: si apre e si compila il file, e si verifica che la testa attraversi lo schermo. Se non lo fa, si usa al suo posto il file di riferimento della Parte 1. Oggi il file cambia in tre passi, e si esegue dopo il secondo e dopo il terzo. La quarta riga enuncia la convenzione di ogni tutorial da qui in avanti: una slide marcata CHANGED sostituisce codice già presente, e una slide marcata NEW aggiunge codice.
 Per il docente: I file di riferimento sono nella cartella verm1 del materiale del corso. Tenete una copia di ogni parte finita: verm1_part1.S, verm1_part2.S e così via.</a:t>
             </a:r>
             <a:endParaRPr lang="en-US" dirty="0"/>
@@ -1271,7 +1271,7 @@
           <a:p>
             <a:r>
               <a:rPr lang="en-US" dirty="0"/>
-              <a:t>I codici delle direzioni sono scelti con cura. Il bit 0 dice se il movimento è verticale; il bit 1 dice se è «all'indietro», verso coordinate minori. Di conseguenza una direzione e la sua opposta differiscono nel bit 1 e solo lì: RIGHT è 00 e LEFT è 10, DOWN è 01 e UP è 11. Quindi lo XOR di due direzioni opposte è sempre 10, cioè 2. Una buona codifica trasforma una regola in una sola porta. Notate anche la didascalia: sullo schermo y cresce verso il basso, quindi DOWN è più 1.
+              <a:t>I codici delle direzioni sono stati scelti di proposito. Il bit 0 dice se il movimento è verticale; il bit 1 se è "all'indietro", verso coordinate minori. Di conseguenza una direzione e la sua opposta differiscono nel bit 1 e solo in quello: RIGHT è 00 e LEFT è 10, DOWN è 01 e UP è 11. Lo XOR di due direzioni opposte vale quindi sempre 10, cioè 2. Una codifica ben scelta riduce una regola a una sola porta, una lezione della Lezione 11 applicata direttamente. La didascalia ricorda una convenzione dello schermo: y cresce verso il basso, quindi DOWN è +1.
 DA COMPRENDERE OGGI: i codici.
 Per il docente: Il bit 0 dice verticale, il bit 1 dice all'indietro. Una direzione e la sua opposta differiscono nel bit 1 e solo lì: codice XOR opposta è sempre 10 in binario, cioè 2. Una buona codifica trasforma una regola in una sola porta: la lezione della Lezione 09.</a:t>
             </a:r>
@@ -1361,7 +1361,7 @@
           <a:p>
             <a:r>
               <a:rPr lang="en-US" dirty="0"/>
-              <a:t>Il percorso di un pulsante, dalla Lezione 10. Il piedino del chip è tenuto a 3,3 V da una resistenza di pull-up; premendo il pulsante lo si collega a massa, quindi il piedino legge 0 quando è premuto. Il runtime inverte i livelli e impacchetta tutti i pulsanti in una parola, in cui 1 significa premuto. La tabella dà la maschera di ogni pulsante di direzione. Due fatti da usare subito: UP e RIGHT premuti insieme danno 0x04 OR 0x02, cioè 0x06; e a0 AND 0x04 vale zero esattamente quando UP non è premuto.
+              <a:t>Il percorso di un pulsante, riassunto dalla Lezione 10. Il piedino è tenuto a 3,3 V da una resistenza di pull-up; premendo il pulsante lo si collega alla massa, quindi il piedino legge 0 quando è premuto. Il runtime inverte i livelli e impacchetta tutti i pulsanti in una parola, con 1 che significa premuto. La tabella dà la maschera di ogni pulsante di direzione. Ne seguono due conseguenze usate subito: UP e RIGHT premuti insieme danno 0x04 OR 0x02, cioè 0x06; e a0 AND 0x04 vale zero esattamente quando UP non è premuto.
 DA COMPRENDERE OGGI: gli ingressi con pull-up.
 Per il docente: Il kit ha pull-up interni di circa 45 kilohm; gli interruttori vanno a massa. La cartuccia non vede mai il livello elettrico: il runtime dà la stessa parola sulla scheda, su QEMU e su PRG32-QT.</a:t>
             </a:r>
@@ -1451,7 +1451,7 @@
           <a:p>
             <a:r>
               <a:rPr lang="en-US" dirty="0"/>
-              <a:t>La regola come tabella di verità: sei delle sue sedici righe. Con la testa che va a destra, chiedere RIGHT dà 00 e la testa prosegue; chiedere DOWN o UP dà 01 o 11, e gira; chiedere LEFT dà 10, cioè 2, e la richiesta è rifiutata. Lo stesso accade per DOWN e UP. Completate voi la tabella e contate i rifiuti: sono quattro, uno per direzione. Con codici scelti a caso la stessa regola richiederebbe quattro confronti distinti.
+              <a:t>La regola espressa come tavola di verità, di cui sono mostrate sei delle sedici righe. Con la testa che va a destra, una richiesta di RIGHT dà 00 e la testa prosegue; una richiesta di DOWN o UP dà 01 o 11, e la testa gira; una richiesta di LEFT dà 10, cioè 2, e viene rifiutata. Lo stesso vale per DOWN e UP. Completando la tavola e contando i rifiuti se ne trovano quattro, uno per direzione. Con codici scelti a caso la stessa regola richiederebbe quattro confronti separati: la codifica ha assorbito la complessità.
 DA COMPRENDERE OGGI: l'algebra di Boole.
 Per il docente: Sedici righe in tutto: chiedere agli studenti di completare la tabella e di contare i rifiuti. Sono quattro, uno per direzione. Senza la codifica accurata la regola richiederebbe quattro confronti.</a:t>
             </a:r>
@@ -1541,7 +1541,7 @@
           <a:p>
             <a:r>
               <a:rPr lang="en-US" dirty="0"/>
-              <a:t>Eseguite la cartuccia in modalità debug e mostrate verm1_update. Guardate prima la telemetria mentre tenete premuto un pulsante: la maschera di ingresso mostra 0x04 per UP e 0x01 per LEFT. Poi mettete un breakpoint sull'istruzione xor t3, t2, t1. Tenete premuto LEFT mentre la testa va a destra e riprendete: il programma si ferma sullo XOR. Leggete i registri: t1 vale 0, la direzione, e t2 vale 2, il desiderio. Un passo: t3 diventa 2. Altri due passi, e vedete il salto avvenire e la sw saltata.
+              <a:t>Si esegue la cartuccia in modalità debug con verm1_update visualizzata. Prima si osserva la telemetria tenendo premuto un pulsante: la maschera d'ingresso vale 0x04 per UP e 0x01 per LEFT. Si imposta poi un breakpoint su xor t3, t2, t1. Tenendo premuto LEFT mentre la testa va a destra e riprendendo l'esecuzione, il programma si ferma sullo XOR. I registri valgono t1 = 0, la direzione, e t2 = 2, la richiesta. Un passo porta t3 a 2; altri due mostrano il salto eseguito e lo sw saltato. La regola si osserva così operare su valori reali.
 DA UTILIZZARE OGGI: il debugger di PRG32-QT (si usa, non si studia, in questo corso).
 Per il docente: Abbassare la velocità del debugger a 0.25x se serve tempo per premere. Resume ignora una volta il breakpoint corrente: ogni Resume esegue un frame. Senza pulsanti premuti t2 è il desiderio precedente e t3 vale 0.</a:t>
             </a:r>
@@ -1631,7 +1631,7 @@
           <a:p>
             <a:r>
               <a:rPr lang="en-US" dirty="0"/>
-              <a:t>Ciò che dovreste leggere, con la testa che va a destra. Senza pulsanti premuti il desiderio è quello precedente e lo XOR vale 0. Con DOWN vale 1 e con UP vale 3: entrambi vengono memorizzati. Con LEFT vale 2, l'inversione a U, e non si memorizza nulla. L'ultima riga mostra la priorità tra i test: con UP e RIGHT insieme vince UP, perché è esaminato per ultimo. Leggete a0 alla prima istruzione dopo la chiamata: più avanti nel frame viene sovrascritto.
+              <a:t>I contenuti attesi dei registri, con la testa che va a destra. Senza nulla premuto, la richiesta è quella precedente e lo XOR vale 0. Con DOWN vale 1, con UP 3, ed entrambe vengono memorizzate. Con LEFT vale 2, l'inversione a U, e nulla viene memorizzato. L'ultima riga rivela la priorità tra i test: con UP e RIGHT insieme prevale UP, perché è verificato per ultimo. a0 va letto alla prima istruzione dopo la chiamata, perché più avanti nel frame viene sovrascritto, un caso della convenzione sui registri salvati dal chiamante studiata nella Lezione 18.
 DA UTILIZZARE OGGI: il debugger di PRG32-QT (si usa, non si studia, in questo corso).
 Per il docente: Tutte con la testa che va a destra. L'ultima riga mostra la priorità dei test: UP è esaminato per ultimo e vince. a0 viene sovrascritto più avanti nel frame: va letto alla prima istruzione dopo la chiamata.</a:t>
             </a:r>
@@ -2750,7 +2750,7 @@
                 <a:ea typeface="Calibri" pitchFamily="34" charset="-122"/>
                 <a:cs typeface="Calibri" pitchFamily="34" charset="-120"/>
               </a:rPr>
-              <a:t>12-Architettura_dei_Calcolatori-Verm1_Parte_2-Codice.pptx</a:t>
+              <a:t>12-Architettura_dei_Calcolatori-Verm1_Parte_2-Lab.pptx</a:t>
             </a:r>
             <a:endParaRPr lang="en-US" sz="1300" dirty="0"/>
           </a:p>

--- a/it/slides/12-Architettura_dei_Calcolatori-Verm1_Parte_2.pptx
+++ b/it/slides/12-Architettura_dei_Calcolatori-Verm1_Parte_2.pptx
@@ -119,7 +119,7 @@
   <p:extLst>
     <p:ext uri="{521415D9-36F7-43E2-AB2F-B90AF26B5E84}">
       <p14:sectionLst xmlns:p14="http://schemas.microsoft.com/office/powerpoint/2010/main">
-        <p14:section name="Apertura" id="{42b19098-a845-e9cd-051e-cdeb5cf6048c}">
+        <p14:section name="Apertura" id="{e0594bcd-5a27-f38c-6d28-b132f9512cdb}">
           <p14:sldIdLst>
             <p14:sldId id="256"/>
             <p14:sldId id="257"/>
@@ -127,18 +127,18 @@
             <p14:sldId id="259"/>
           </p14:sldIdLst>
         </p14:section>
-        <p14:section name="Passo 1: nomi per i bit" id="{e0c3c9df-e402-9451-a332-a2738cdbfd5c}">
+        <p14:section name="Passo 1: nomi per i bit" id="{25f0658c-11ed-7f23-f49b-ef4e4074cff1}">
           <p14:sldIdLst>
             <p14:sldId id="260"/>
           </p14:sldIdLst>
         </p14:section>
-        <p14:section name="Passo 2: la guida" id="{c929f522-bd17-8f4b-b4df-10d90f61dbe1}">
+        <p14:section name="Passo 2: la guida" id="{1e32019f-b198-da37-0148-ec52954a7dc8}">
           <p14:sldIdLst>
             <p14:sldId id="261"/>
             <p14:sldId id="262"/>
           </p14:sldIdLst>
         </p14:section>
-        <p14:section name="Passo 4: osservare una decisione" id="{adf81f93-6690-1f24-16b1-e0afcbffb08d}">
+        <p14:section name="Passo 4: osservare una decisione" id="{ca936c8e-bd9f-a857-fbcc-db8dfb7f4e48}">
           <p14:sldIdLst>
             <p14:sldId id="263"/>
             <p14:sldId id="264"/>

--- a/it/slides/12-Architettura_dei_Calcolatori-Verm1_Parte_2.pptx
+++ b/it/slides/12-Architettura_dei_Calcolatori-Verm1_Parte_2.pptx
@@ -119,7 +119,7 @@
   <p:extLst>
     <p:ext uri="{521415D9-36F7-43E2-AB2F-B90AF26B5E84}">
       <p14:sectionLst xmlns:p14="http://schemas.microsoft.com/office/powerpoint/2010/main">
-        <p14:section name="Apertura" id="{e0594bcd-5a27-f38c-6d28-b132f9512cdb}">
+        <p14:section name="Apertura" id="{4ca77e84-defd-db00-3fcc-0d7efac9092d}">
           <p14:sldIdLst>
             <p14:sldId id="256"/>
             <p14:sldId id="257"/>
@@ -127,18 +127,18 @@
             <p14:sldId id="259"/>
           </p14:sldIdLst>
         </p14:section>
-        <p14:section name="Passo 1: nomi per i bit" id="{25f0658c-11ed-7f23-f49b-ef4e4074cff1}">
+        <p14:section name="Passo 1: nomi per i bit" id="{dbc1fa27-5635-a9e8-5836-c5cf4516eebc}">
           <p14:sldIdLst>
             <p14:sldId id="260"/>
           </p14:sldIdLst>
         </p14:section>
-        <p14:section name="Passo 2: la guida" id="{1e32019f-b198-da37-0148-ec52954a7dc8}">
+        <p14:section name="Passo 2: la guida" id="{21865116-3f0d-6113-cd88-903743ff2616}">
           <p14:sldIdLst>
             <p14:sldId id="261"/>
             <p14:sldId id="262"/>
           </p14:sldIdLst>
         </p14:section>
-        <p14:section name="Passo 4: osservare una decisione" id="{ca936c8e-bd9f-a857-fbcc-db8dfb7f4e48}">
+        <p14:section name="Passo 4: osservare una decisione" id="{35890d03-2bb5-ae67-a99c-1fc984fee85a}">
           <p14:sldIdLst>
             <p14:sldId id="263"/>
             <p14:sldId id="264"/>
@@ -555,6 +555,8 @@
               <a:t>Il secondo tutorial del progetto. Alla fine della Parte 1 la testa attraversava lo schermo da sola; oggi entra in gioco il giocatore. Si aggiunge la guida con il joystick, insieme a un cibo che compare a caso, un punteggio e un suono. Tutto poggia sulle quattro lezioni del blocco di logica: un pulsante è un bit selezionato da una maschera, la regola che vieta l'inversione a U è un solo XOR, e il movimento si legge da una tabella come lo selezionerebbe un multiplexer. La frase di Sid Meier in copertina nomina ciò che si aggiunge: scelte che contano.
 Stato di apprendimento: DA COMPRENDERE OGGI, alla fine di questa lezione lo spiegate, lo seguite passo passo e lo applicate da soli; DA UTILIZZARE OGGI, oggi seguite e usate la ricetta; come funziona dentro si spiega più avanti, o non fa parte del corso; DA COMPRENDERE PIÙ AVANTI, riconoscete il nome e lo scopo; lo spiega una lezione successiva. Una slide senza etichetta è contesto: una storia, un esempio, una domanda, un esercizio.
 Stato di apprendimento di questa lezione. DA COMPRENDERE OGGI: le maschere di bit; i codici; gli array in memoria; gli ingressi con pull-up; l'algebra di Boole; la virgola fissa; i multiplexer; istruzioni con o senza segno; comparatori e parità; gli argomenti in a0 ... a7. DA UTILIZZARE OGGI: la convenzione di chiamata (Lezione 18) e, usati senza essere studiati nel corso, gli strumenti di PRG32, le chiamate del runtime PRG32, il debugger di PRG32-QT. DA COMPRENDERE PIÙ AVANTI: niente. Una slide senza etichetta è contesto: una storia, un esempio, una domanda, un esercizio.
+Percorso. I risultati di oggi: (1) leggere i pulsanti con le maschere e rifiutare un'inversione a U con un solo XOR; (2) confrontare posizioni con XOR e OR per riconoscere il cibo; (3) tenere e mostrare un punteggio. Si appoggia su: le maschere di bit (Lezione 08); i codici (Lezione 11); gli array in memoria (Lezione 04); gli ingressi con pull-up (Lezione 10); l'algebra di Boole (Lezione 08). Prossimo passo: Lezione 13, Macchine sequenziali.
+Ponte. Nella Lezione 07 una funzione che ne chiama un'altra salvava ra in un frame di 16 byte. Oggi le funzioni di Verm1 si chiamano più in profondità: ciascuna salva ra una volta, all'ingresso, e lo ripristina prima di ret. La Lezione 18 enuncia le regole: quali registri una chiamata può cambiare e quali deve conservare. Richiamo: Una funzione chiama altre due funzioni. Quante volte deve salvare ra, e dove?
 Per il docente: Secondo tutorial del progetto. Usa le Lezioni da 08 a 11: operatori booleani e tabelle di verità (08), XOR e uguaglianza, semplificazione (09), pulsanti come interruttori con pull-up (10), comparatori, multiplexer e ROM come tabella (11). Gli studenti partono dalla propria Parte 1 funzionante; il file di riferimento è verm1/verm1_part2.S.</a:t>
             </a:r>
             <a:endParaRPr lang="en-US" dirty="0"/>
@@ -916,7 +918,7 @@
             <a:r>
               <a:rPr lang="en-US" dirty="0"/>
               <a:t>La situazione attuale. Il giocatore è ora nel gioco: una richiesta, una regola, un movimento, una ricompensa. La logica di quattro lezioni è diventata istruzioni: bit e maschere, lo XOR come comparatore, una tabella come selettore. Eppure il verme non ha corpo, nulla può andare storto, e il gioco non finisce mai. Il prossimo blocco, su stato e memoria, fornisce i concetti necessari, e la Parte 3 aggiunge un corpo che cresce, le collisioni, una schermata del titolo e una di fine partita.
-Stato di apprendimento, riepilogo. DA COMPRENDERE OGGI: le maschere di bit; i codici; gli array in memoria; gli ingressi con pull-up; l'algebra di Boole; la virgola fissa; i multiplexer; istruzioni con o senza segno; comparatori e parità; gli argomenti in a0 ... a7. DA UTILIZZARE OGGI: la convenzione di chiamata (Lezione 18) e, usati senza essere studiati nel corso, gli strumenti di PRG32, le chiamate del runtime PRG32, il debugger di PRG32-QT. DA COMPRENDERE PIÙ AVANTI: niente. Una slide senza etichetta è contesto: una storia, un esempio, una domanda, un esercizio.
+Stato di apprendimento, riepilogo. DA COMPRENDERE OGGI: le maschere di bit; i codici; gli array in memoria; gli ingressi con pull-up; l'algebra di Boole; la virgola fissa; i multiplexer; istruzioni con o senza segno; comparatori e parità; gli argomenti in a0 ... a7. DA UTILIZZARE OGGI: la convenzione di chiamata (Lezione 18) e, usati senza essere studiati nel corso, gli strumenti di PRG32, le chiamate del runtime PRG32, il debugger di PRG32-QT. DA COMPRENDERE PIÙ AVANTI: niente. Una slide senza etichetta è contesto: una storia, un esempio, una domanda, un esercizio. Il filo della lezione: Ogni regola del gioco è diventata qualche istruzione logica: una maschera, uno XOR, un confronto. Prossimo passo: i circuiti che ricordano, e gli stati di un gioco. Biglietto d'uscita (da due a quattro minuti, da soli, su carta): 1. Le direzioni sono codificate RIGHT 0, DOWN 1, LEFT 2, UP 3. Il verme va a RIGHT e il giocatore spinge LEFT. Che cosa dà xor t3, t2, t1, e che cosa ne fa il codice?
 Per il docente: File di riferimento di questa parte: verm1/verm1_part2.S (231 righe).</a:t>
             </a:r>
             <a:endParaRPr lang="en-US" dirty="0"/>
